--- a/Curriculo/Fase3_Basico2/decks/Basico2_S03_Jay.pptx
+++ b/Curriculo/Fase3_Basico2/decks/Basico2_S03_Jay.pptx
@@ -140,7 +140,7 @@
   <p:extLst>
     <p:ext uri="{521415D9-36F7-43E2-AB2F-B90AF26B5E84}">
       <p14:sectionLst xmlns:p14="http://schemas.microsoft.com/office/powerpoint/2010/main">
-        <p14:section name="Semana 3" id="{9770362C-C1C7-CE19-EF52-523A7B4D78E4}">
+        <p14:section name="Semana 3" id="{3814C3A2-07F5-4CB5-4D1C-73FC3F525683}">
           <p14:sldIdLst>
             <p14:sldId id="256"/>
             <p14:sldId id="257"/>
@@ -212,7 +212,7 @@
     </p:spTree>
     <p:extLst>
       <p:ext uri="{BB962C8B-B14F-4D97-AF65-F5344CB8AC3E}">
-        <p14:creationId xmlns:p14="http://schemas.microsoft.com/office/powerpoint/2010/main" val="4214242671"/>
+        <p14:creationId xmlns:p14="http://schemas.microsoft.com/office/powerpoint/2010/main" val="3876468707"/>
       </p:ext>
     </p:extLst>
   </p:cSld>
@@ -804,7 +804,7 @@
             <a:r>
               <a:rPr lang="en-US" dirty="0"/>
               <a:t>21:17–21:19 · 2 min. «En la clase 1 les marqué un error: 회사에 일해요. Hoy, el porqué. En español, ‘en’ sirve para todo: estoy en la oficina, trabajo en la oficina. En coreano son dos: 에 cuando algo está en un lugar o cuando vas; 에서 cuando en ese lugar pasa una acción.» Recorre los pares señalando el dibujo y cierra con el 에 de la hora (clase 2).
-Imagen sugerida: Un dibujo por par: persona en casa / persona descansando en casa · camino a la oficina / trabajando en la oficina · camino al café / estudiando en el café · reloj 9:00
+Imagen: incluida (dibujo de la casa).
 Fuente: Nueva (Particulas_Coreanas_Editable.pptx no trae 에/에서)
 Lámina 14</a:t>
             </a:r>
@@ -1161,7 +1161,7 @@
             <a:r>
               <a:rPr lang="en-US" dirty="0"/>
               <a:t>21:22–21:23 · 1 min. «Hay un segundo estilo cortés que van a oír en todas partes: el coreano ‘de micrófono’. El metro, las noticias, las tiendas grandes, una presentación ante un grupo. Y ustedes ya lo dicen desde el día 1: 감사합니다, 반갑습니다.» Experto de julio (20 s): «Los que estuvieron en julio: ¿se acuerdan de 갑니다? [nombre], ¿qué recuerdas?» Si no sale, sigues.
-Imagen sugerida: Íconos: metro, noticias (televisor), tienda grande, persona presentando ante un grupo
+Imagen: incluida (dibujo de la casa).
 Fuente: Nueva
 Lámina 17</a:t>
             </a:r>
@@ -1340,7 +1340,7 @@
             <a:r>
               <a:rPr lang="en-US" dirty="0"/>
               <a:t>21:00–21:03 · 2 min. Antes de hablar, pon el chat en «solo anfitrión». «Quiz 2, sobre la clase de números. Cinco preguntas, un solo mensaje, numerado, en 한글. Dos minutos. Hoy el chat me llega solo a mí.» Lee los 5 ítems en voz alta. Mientras responden, renombra las 7 salas con las parejas del mapa del grupo; a las 21:03, «끝!»: guarda el chat y vuelve a ponerlo en «todos».
-Imagen sugerida: Tarjeta de cumpleaños dibujada con el texto del ítem 5: 지수 생일 파티 · 11월 6일 (금) · 저녁 7시 · 카페 서울
+Imagen: incluida (dibujo de la casa).
 Fuente: Nueva (ítem 5 original estilo TOPIK I, formato 40–42 de 읽기; revisar D-12)
 Lámina 2</a:t>
             </a:r>
@@ -1608,7 +1608,7 @@
             <a:r>
               <a:rPr lang="en-US" dirty="0"/>
               <a:t>21:27–21:30 · 3 min. «¿Saben qué hora es ahora en Seúl? Las nueve de la mañana del jueves. Ahora mismo, muchísima gente acaba de… 출근해요.» Coro dos veces: «따라 하세요: 아홉 시에 출근해요. 여섯 시에 퇴근해요.» Al irse antes: 먼저 가겠습니다 y 먼저 들어가 보겠습니다, solo para reconocer (revisar D-7); ¿ven el -습니다? Oficina, estilo formal. Puente: «¿Cómo se despiden ustedes en la pega?» (1–2 respuestas). Nunca «en Corea todos».
-Imagen sugerida: Foto de una oficina en Seúl (licencia libre, sin marcas) con un reloj «Seúl, jueves 9:00»
+Imagen: incluida (dibujo de la casa).
 Fuente: Nueva
 Lámina 21</a:t>
             </a:r>
@@ -2944,7 +2944,7 @@
             <a:r>
               <a:rPr lang="en-US" dirty="0"/>
               <a:t>21:05–21:07 · 2 min. «Les cuento mi día. No les traduzco: miren la foto y la hora, escuchen, y escriban en el chat, en español, qué hago.» Di cada frase dos veces, con gesto (te estiras, te lavas la cara, comes, te pones audífonos…). Las frases están en L6; el guion es un ejemplo: usa tu día real y conserva 쯤, -고, 에서 y 바빠요 (revisar S3-b; si trabajas en casa: 집에서 일해요).
-Imagen sugerida: 6 fotos del día de Jay (las elige Jay, propias o con licencia libre), numeradas y con su hora, sin texto: despertador 7:00 · lavarse + desayuno 7:30 · computador 9:00 · ejercicio en el parque 18:00 · audífonos en casa 20:00 · pantalla de la clase 21:00
+Imagen: incluida (dibujo de la casa).
 Fuente: Nueva (fotos de Jay) · idea de julio L19
 Lámina 5</a:t>
             </a:r>
@@ -3034,7 +3034,7 @@
             <a:r>
               <a:rPr lang="en-US" dirty="0"/>
               <a:t>21:07 · 1 min. Revela las frases y confirma lo que escribieron en el chat: «¡Exacto! 출근해요 es ‘entro a trabajar’, y 퇴근해요, ‘salgo del trabajo’. Una palabra para lo que en español es una frase.» Si cambiaste tu día en L5, cambia también estas frases.
-Imagen sugerida: Las mismas 6 fotos de L5 en miniatura, una sobre cada frase
+Imagen: incluida (dibujo de la casa).
 Fuente: Julio L19 (A1_Nivel_1/07_Rutina_Diaria/Sesion_07_Rutina_Diaria_v2.pptx), adaptada: sin magenta FF00FF ni rojo FF5C5C; 7시에 → 일곱 시쯤 y con 에서
 Lámina 6</a:t>
             </a:r>
@@ -4582,7 +4582,7 @@
         <p:spPr>
           <a:xfrm>
             <a:off x="548640" y="1325880"/>
-            <a:ext cx="11064240" cy="457200"/>
+            <a:ext cx="11091672" cy="457200"/>
           </a:xfrm>
           <a:prstGeom prst="rect">
             <a:avLst/>
@@ -5447,7 +5447,7 @@
         <p:spPr>
           <a:xfrm>
             <a:off x="548640" y="1325880"/>
-            <a:ext cx="11064240" cy="457200"/>
+            <a:ext cx="11091672" cy="457200"/>
           </a:xfrm>
           <a:prstGeom prst="rect">
             <a:avLst/>
@@ -6851,7 +6851,7 @@
         <p:spPr>
           <a:xfrm>
             <a:off x="548640" y="1325880"/>
-            <a:ext cx="11064240" cy="457200"/>
+            <a:ext cx="11091672" cy="457200"/>
           </a:xfrm>
           <a:prstGeom prst="rect">
             <a:avLst/>
@@ -6889,7 +6889,7 @@
           <p:nvPr>
             <p:extLst>
               <p:ext uri="{D42A27DB-BD31-4B8C-83A1-F6EECF244321}">
-                <p14:modId xmlns:p14="http://schemas.microsoft.com/office/powerpoint/2010/main" val="3171139929"/>
+                <p14:modId xmlns:p14="http://schemas.microsoft.com/office/powerpoint/2010/main" val="832117448"/>
               </p:ext>
             </p:extLst>
           </p:nvPr>
@@ -8988,7 +8988,7 @@
         <p:spPr>
           <a:xfrm>
             <a:off x="548640" y="1325880"/>
-            <a:ext cx="11064240" cy="457200"/>
+            <a:ext cx="11091672" cy="457200"/>
           </a:xfrm>
           <a:prstGeom prst="rect">
             <a:avLst/>
@@ -9123,15 +9123,39 @@
           </a:p>
         </p:txBody>
       </p:sp>
-      <p:sp>
-        <p:nvSpPr>
-          <p:cNvPr id="6" name="Text 4"/>
+      <p:pic>
+        <p:nvPicPr>
+          <p:cNvPr id="6" name="col_img_0" descr="C:\Users\Chingu\AppData\Local\Temp\claude\C--Users-Chingu-Desktop-ACADEMIASEULWEB\d4111e1b-5523-44ea-97b2-b1a1d9545b9e\scratchpad\decks\cache\img_2a464c90087fafc4.png"/>
+          <p:cNvPicPr>
+            <a:picLocks noChangeAspect="1"/>
+          </p:cNvPicPr>
+          <p:nvPr/>
+        </p:nvPicPr>
+        <p:blipFill>
+          <a:blip r:embed="rId3"/>
+          <a:stretch>
+            <a:fillRect/>
+          </a:stretch>
+        </p:blipFill>
+        <p:spPr>
+          <a:xfrm>
+            <a:off x="2487168" y="2651760"/>
+            <a:ext cx="1508760" cy="685800"/>
+          </a:xfrm>
+          <a:prstGeom prst="rect">
+            <a:avLst/>
+          </a:prstGeom>
+        </p:spPr>
+      </p:pic>
+      <p:sp>
+        <p:nvSpPr>
+          <p:cNvPr id="7" name="Text 4"/>
           <p:cNvSpPr txBox="1"/>
           <p:nvPr/>
         </p:nvSpPr>
         <p:spPr>
           <a:xfrm>
-            <a:off x="777240" y="2651760"/>
+            <a:off x="777240" y="3429000"/>
             <a:ext cx="4928616" cy="914400"/>
           </a:xfrm>
           <a:prstGeom prst="rect">
@@ -9166,14 +9190,14 @@
       </p:sp>
       <p:sp>
         <p:nvSpPr>
-          <p:cNvPr id="7" name="lista"/>
+          <p:cNvPr id="8" name="lista"/>
           <p:cNvSpPr txBox="1"/>
           <p:nvPr/>
         </p:nvSpPr>
         <p:spPr>
           <a:xfrm>
-            <a:off x="731520" y="3657600"/>
-            <a:ext cx="5020056" cy="2377440"/>
+            <a:off x="731520" y="4434840"/>
+            <a:ext cx="5020056" cy="1600200"/>
           </a:xfrm>
           <a:prstGeom prst="rect">
             <a:avLst/>
@@ -9195,7 +9219,7 @@
               <a:buChar char="•"/>
             </a:pPr>
             <a:r>
-              <a:rPr lang="ko-KR" altLang="en-US" sz="2000" dirty="0">
+              <a:rPr lang="ko-KR" altLang="en-US" sz="1900" dirty="0">
                 <a:solidFill>
                   <a:srgbClr val="14142B"/>
                 </a:solidFill>
@@ -9205,7 +9229,7 @@
               </a:rPr>
               <a:t>집에 있어요</a:t>
             </a:r>
-            <a:endParaRPr lang="en-US" sz="2000" dirty="0"/>
+            <a:endParaRPr lang="en-US" sz="1900" dirty="0"/>
           </a:p>
           <a:p>
             <a:pPr marL="228600" indent="-228600" eaLnBrk="1">
@@ -9216,7 +9240,7 @@
               <a:buChar char="•"/>
             </a:pPr>
             <a:r>
-              <a:rPr lang="ko-KR" altLang="en-US" sz="2000" dirty="0">
+              <a:rPr lang="ko-KR" altLang="en-US" sz="1900" dirty="0">
                 <a:solidFill>
                   <a:srgbClr val="14142B"/>
                 </a:solidFill>
@@ -9226,7 +9250,7 @@
               </a:rPr>
               <a:t>회사에 가요</a:t>
             </a:r>
-            <a:endParaRPr lang="en-US" sz="2000" dirty="0"/>
+            <a:endParaRPr lang="en-US" sz="1900" dirty="0"/>
           </a:p>
           <a:p>
             <a:pPr marL="228600" indent="-228600" eaLnBrk="1">
@@ -9237,7 +9261,7 @@
               <a:buChar char="•"/>
             </a:pPr>
             <a:r>
-              <a:rPr lang="ko-KR" altLang="en-US" sz="2000" dirty="0">
+              <a:rPr lang="ko-KR" altLang="en-US" sz="1900" dirty="0">
                 <a:solidFill>
                   <a:srgbClr val="14142B"/>
                 </a:solidFill>
@@ -9247,7 +9271,7 @@
               </a:rPr>
               <a:t>카페에 가요</a:t>
             </a:r>
-            <a:endParaRPr lang="en-US" sz="2000" dirty="0"/>
+            <a:endParaRPr lang="en-US" sz="1900" dirty="0"/>
           </a:p>
           <a:p>
             <a:pPr marL="228600" indent="-228600" eaLnBrk="1">
@@ -9258,7 +9282,7 @@
               <a:buChar char="•"/>
             </a:pPr>
             <a:r>
-              <a:rPr lang="ko-KR" altLang="en-US" sz="2000" dirty="0">
+              <a:rPr lang="ko-KR" altLang="en-US" sz="1900" dirty="0">
                 <a:solidFill>
                   <a:srgbClr val="14142B"/>
                 </a:solidFill>
@@ -9266,15 +9290,15 @@
                 <a:ea typeface="Malgun Gothic" pitchFamily="34" charset="-122"/>
                 <a:cs typeface="Malgun Gothic" pitchFamily="34" charset="-120"/>
               </a:rPr>
-              <a:t>아홉 시에 출근해요</a:t>
-            </a:r>
-            <a:endParaRPr lang="en-US" sz="2000" dirty="0"/>
-          </a:p>
-        </p:txBody>
-      </p:sp>
-      <p:sp>
-        <p:nvSpPr>
-          <p:cNvPr id="8" name="col_1"/>
+              <a:t>아홉 시에 출근해요</a:t>
+            </a:r>
+            <a:endParaRPr lang="en-US" sz="1900" dirty="0"/>
+          </a:p>
+        </p:txBody>
+      </p:sp>
+      <p:sp>
+        <p:nvSpPr>
+          <p:cNvPr id="9" name="col_1"/>
           <p:cNvSpPr/>
           <p:nvPr/>
         </p:nvSpPr>
@@ -9301,7 +9325,7 @@
       </p:sp>
       <p:sp>
         <p:nvSpPr>
-          <p:cNvPr id="9" name="Text 7"/>
+          <p:cNvPr id="10" name="Text 7"/>
           <p:cNvSpPr txBox="1"/>
           <p:nvPr/>
         </p:nvSpPr>
@@ -9348,15 +9372,39 @@
           </a:p>
         </p:txBody>
       </p:sp>
-      <p:sp>
-        <p:nvSpPr>
-          <p:cNvPr id="10" name="Text 8"/>
+      <p:pic>
+        <p:nvPicPr>
+          <p:cNvPr id="11" name="col_img_1" descr="C:\Users\Chingu\AppData\Local\Temp\claude\C--Users-Chingu-Desktop-ACADEMIASEULWEB\d4111e1b-5523-44ea-97b2-b1a1d9545b9e\scratchpad\decks\cache\img_ead7cac4ba9cd60d.png"/>
+          <p:cNvPicPr>
+            <a:picLocks noChangeAspect="1"/>
+          </p:cNvPicPr>
+          <p:nvPr/>
+        </p:nvPicPr>
+        <p:blipFill>
+          <a:blip r:embed="rId4"/>
+          <a:stretch>
+            <a:fillRect/>
+          </a:stretch>
+        </p:blipFill>
+        <p:spPr>
+          <a:xfrm>
+            <a:off x="7790688" y="2651760"/>
+            <a:ext cx="2313432" cy="1051560"/>
+          </a:xfrm>
+          <a:prstGeom prst="rect">
+            <a:avLst/>
+          </a:prstGeom>
+        </p:spPr>
+      </p:pic>
+      <p:sp>
+        <p:nvSpPr>
+          <p:cNvPr id="12" name="Text 8"/>
           <p:cNvSpPr txBox="1"/>
           <p:nvPr/>
         </p:nvSpPr>
         <p:spPr>
           <a:xfrm>
-            <a:off x="6483096" y="2651760"/>
+            <a:off x="6483096" y="3794760"/>
             <a:ext cx="4928616" cy="914400"/>
           </a:xfrm>
           <a:prstGeom prst="rect">
@@ -9391,14 +9439,14 @@
       </p:sp>
       <p:sp>
         <p:nvSpPr>
-          <p:cNvPr id="11" name="lista"/>
+          <p:cNvPr id="13" name="lista"/>
           <p:cNvSpPr txBox="1"/>
           <p:nvPr/>
         </p:nvSpPr>
         <p:spPr>
           <a:xfrm>
-            <a:off x="6437376" y="3657600"/>
-            <a:ext cx="5020056" cy="2377440"/>
+            <a:off x="6437376" y="4800600"/>
+            <a:ext cx="5020056" cy="1234440"/>
           </a:xfrm>
           <a:prstGeom prst="rect">
             <a:avLst/>
@@ -10161,7 +10209,7 @@
         <p:spPr>
           <a:xfrm>
             <a:off x="548640" y="1325880"/>
-            <a:ext cx="11064240" cy="548640"/>
+            <a:ext cx="11091672" cy="548640"/>
           </a:xfrm>
           <a:prstGeom prst="rect">
             <a:avLst/>
@@ -11460,7 +11508,7 @@
         <p:spPr>
           <a:xfrm>
             <a:off x="548640" y="1325880"/>
-            <a:ext cx="11064240" cy="548640"/>
+            <a:ext cx="11091672" cy="548640"/>
           </a:xfrm>
           <a:prstGeom prst="rect">
             <a:avLst/>
@@ -11519,7 +11567,7 @@
         </p:nvSpPr>
         <p:spPr>
           <a:xfrm>
-            <a:off x="548640" y="2171700"/>
+            <a:off x="548640" y="2574950"/>
             <a:ext cx="457200" cy="457200"/>
           </a:xfrm>
           <a:prstGeom prst="ellipse">
@@ -11544,7 +11592,7 @@
         </p:nvSpPr>
         <p:spPr>
           <a:xfrm>
-            <a:off x="548640" y="2171700"/>
+            <a:off x="548640" y="2574950"/>
             <a:ext cx="457200" cy="457200"/>
           </a:xfrm>
           <a:prstGeom prst="rect">
@@ -11582,7 +11630,7 @@
         </p:nvSpPr>
         <p:spPr>
           <a:xfrm>
-            <a:off x="1188720" y="1965960"/>
+            <a:off x="1188720" y="2369210"/>
             <a:ext cx="5285232" cy="868680"/>
           </a:xfrm>
           <a:prstGeom prst="rect">
@@ -11642,7 +11690,7 @@
         </p:nvSpPr>
         <p:spPr>
           <a:xfrm>
-            <a:off x="6702552" y="2002536"/>
+            <a:off x="6702552" y="2405786"/>
             <a:ext cx="4937760" cy="795528"/>
           </a:xfrm>
           <a:prstGeom prst="roundRect">
@@ -11669,7 +11717,7 @@
         </p:nvSpPr>
         <p:spPr>
           <a:xfrm>
-            <a:off x="6793992" y="2002536"/>
+            <a:off x="6793992" y="2405786"/>
             <a:ext cx="4754880" cy="795528"/>
           </a:xfrm>
           <a:prstGeom prst="rect">
@@ -11710,7 +11758,7 @@
         </p:nvSpPr>
         <p:spPr>
           <a:xfrm>
-            <a:off x="548640" y="3168396"/>
+            <a:off x="548640" y="3571646"/>
             <a:ext cx="457200" cy="457200"/>
           </a:xfrm>
           <a:prstGeom prst="ellipse">
@@ -11735,7 +11783,7 @@
         </p:nvSpPr>
         <p:spPr>
           <a:xfrm>
-            <a:off x="548640" y="3168396"/>
+            <a:off x="548640" y="3571646"/>
             <a:ext cx="457200" cy="457200"/>
           </a:xfrm>
           <a:prstGeom prst="rect">
@@ -11773,7 +11821,7 @@
         </p:nvSpPr>
         <p:spPr>
           <a:xfrm>
-            <a:off x="1188720" y="2962656"/>
+            <a:off x="1188720" y="3365906"/>
             <a:ext cx="5285232" cy="868680"/>
           </a:xfrm>
           <a:prstGeom prst="rect">
@@ -11833,7 +11881,7 @@
         </p:nvSpPr>
         <p:spPr>
           <a:xfrm>
-            <a:off x="6702552" y="2999232"/>
+            <a:off x="6702552" y="3402482"/>
             <a:ext cx="4937760" cy="795528"/>
           </a:xfrm>
           <a:prstGeom prst="roundRect">
@@ -11860,7 +11908,7 @@
         </p:nvSpPr>
         <p:spPr>
           <a:xfrm>
-            <a:off x="6793992" y="2999232"/>
+            <a:off x="6793992" y="3402482"/>
             <a:ext cx="4754880" cy="795528"/>
           </a:xfrm>
           <a:prstGeom prst="rect">
@@ -11901,7 +11949,7 @@
         </p:nvSpPr>
         <p:spPr>
           <a:xfrm>
-            <a:off x="548640" y="4165092"/>
+            <a:off x="548640" y="4568342"/>
             <a:ext cx="457200" cy="457200"/>
           </a:xfrm>
           <a:prstGeom prst="ellipse">
@@ -11926,7 +11974,7 @@
         </p:nvSpPr>
         <p:spPr>
           <a:xfrm>
-            <a:off x="548640" y="4165092"/>
+            <a:off x="548640" y="4568342"/>
             <a:ext cx="457200" cy="457200"/>
           </a:xfrm>
           <a:prstGeom prst="rect">
@@ -11964,7 +12012,7 @@
         </p:nvSpPr>
         <p:spPr>
           <a:xfrm>
-            <a:off x="1188720" y="3959352"/>
+            <a:off x="1188720" y="4362602"/>
             <a:ext cx="5285232" cy="868680"/>
           </a:xfrm>
           <a:prstGeom prst="rect">
@@ -12024,7 +12072,7 @@
         </p:nvSpPr>
         <p:spPr>
           <a:xfrm>
-            <a:off x="6702552" y="3995928"/>
+            <a:off x="6702552" y="4399178"/>
             <a:ext cx="4937760" cy="795528"/>
           </a:xfrm>
           <a:prstGeom prst="roundRect">
@@ -12051,7 +12099,7 @@
         </p:nvSpPr>
         <p:spPr>
           <a:xfrm>
-            <a:off x="6793992" y="3995928"/>
+            <a:off x="6793992" y="4399178"/>
             <a:ext cx="4754880" cy="795528"/>
           </a:xfrm>
           <a:prstGeom prst="rect">
@@ -12522,7 +12570,7 @@
         <p:spPr>
           <a:xfrm>
             <a:off x="548640" y="1325880"/>
-            <a:ext cx="6949440" cy="548640"/>
+            <a:ext cx="5669280" cy="548640"/>
           </a:xfrm>
           <a:prstGeom prst="rect">
             <a:avLst/>
@@ -12560,7 +12608,7 @@
         <p:spPr>
           <a:xfrm>
             <a:off x="548640" y="1965960"/>
-            <a:ext cx="6949440" cy="4206240"/>
+            <a:ext cx="5669280" cy="4206240"/>
           </a:xfrm>
           <a:prstGeom prst="rect">
             <a:avLst/>
@@ -12698,12 +12746,12 @@
         </p:nvSpPr>
         <p:spPr>
           <a:xfrm>
-            <a:off x="8001000" y="1417320"/>
-            <a:ext cx="3611880" cy="4480560"/>
+            <a:off x="6446520" y="1371600"/>
+            <a:ext cx="5193792" cy="4800600"/>
           </a:xfrm>
           <a:prstGeom prst="roundRect">
             <a:avLst>
-              <a:gd name="adj" fmla="val 6329"/>
+              <a:gd name="adj" fmla="val 4762"/>
             </a:avLst>
           </a:prstGeom>
           <a:solidFill>
@@ -12717,66 +12765,30 @@
           </a:ln>
         </p:spPr>
       </p:sp>
-      <p:sp>
-        <p:nvSpPr>
-          <p:cNvPr id="6" name="ko_grande"/>
-          <p:cNvSpPr txBox="1"/>
-          <p:nvPr/>
-        </p:nvSpPr>
-        <p:spPr>
-          <a:xfrm>
-            <a:off x="8092440" y="1874520"/>
-            <a:ext cx="3429000" cy="2926080"/>
+      <p:pic>
+        <p:nvPicPr>
+          <p:cNvPr id="6" name="imagen" descr="C:\Users\Chingu\AppData\Local\Temp\claude\C--Users-Chingu-Desktop-ACADEMIASEULWEB\d4111e1b-5523-44ea-97b2-b1a1d9545b9e\scratchpad\decks\cache\img_c205a980edee5b96.png"/>
+          <p:cNvPicPr>
+            <a:picLocks noChangeAspect="1"/>
+          </p:cNvPicPr>
+          <p:nvPr/>
+        </p:nvPicPr>
+        <p:blipFill>
+          <a:blip r:embed="rId3"/>
+          <a:stretch>
+            <a:fillRect/>
+          </a:stretch>
+        </p:blipFill>
+        <p:spPr>
+          <a:xfrm>
+            <a:off x="7040833" y="1463040"/>
+            <a:ext cx="4005165" cy="4617720"/>
           </a:xfrm>
           <a:prstGeom prst="rect">
             <a:avLst/>
           </a:prstGeom>
-          <a:noFill/>
-          <a:ln/>
-        </p:spPr>
-        <p:txBody>
-          <a:bodyPr wrap="square" lIns="0" tIns="0" rIns="0" bIns="0" rtlCol="0" anchor="ctr">
-            <a:normAutofit/>
-          </a:bodyPr>
-          <a:lstStyle/>
-          <a:p>
-            <a:pPr marL="0" indent="0" algn="ctr" eaLnBrk="1">
-              <a:buNone/>
-            </a:pPr>
-            <a:r>
-              <a:rPr lang="ko-KR" altLang="en-US" sz="3200" b="1" dirty="0">
-                <a:solidFill>
-                  <a:srgbClr val="4236F6"/>
-                </a:solidFill>
-                <a:latin typeface="Malgun Gothic" pitchFamily="34" charset="0"/>
-                <a:ea typeface="Malgun Gothic" pitchFamily="34" charset="-122"/>
-                <a:cs typeface="Malgun Gothic" pitchFamily="34" charset="-120"/>
-              </a:rPr>
-              <a:t>-ㅂ니다</a:t>
-            </a:r>
-            <a:r>
-              <a:rPr lang="en-US" sz="3200" b="1" dirty="0">
-                <a:solidFill>
-                  <a:srgbClr val="4236F6"/>
-                </a:solidFill>
-              </a:rPr>
-              <a:t>/</a:t>
-            </a:r>
-            <a:r>
-              <a:rPr lang="ko-KR" altLang="en-US" sz="3200" b="1" dirty="0">
-                <a:solidFill>
-                  <a:srgbClr val="4236F6"/>
-                </a:solidFill>
-                <a:latin typeface="Malgun Gothic" pitchFamily="34" charset="0"/>
-                <a:ea typeface="Malgun Gothic" pitchFamily="34" charset="-122"/>
-                <a:cs typeface="Malgun Gothic" pitchFamily="34" charset="-120"/>
-              </a:rPr>
-              <a:t>습니다</a:t>
-            </a:r>
-            <a:endParaRPr lang="en-US" sz="3200" dirty="0"/>
-          </a:p>
-        </p:txBody>
-      </p:sp>
+        </p:spPr>
+      </p:pic>
       <p:sp>
         <p:nvSpPr>
           <p:cNvPr id="25" name="Slide Number Placeholder 0"/>
@@ -12929,7 +12941,7 @@
         <p:spPr>
           <a:xfrm>
             <a:off x="548640" y="1325880"/>
-            <a:ext cx="11064240" cy="457200"/>
+            <a:ext cx="11091672" cy="457200"/>
           </a:xfrm>
           <a:prstGeom prst="rect">
             <a:avLst/>
@@ -13054,7 +13066,7 @@
           <p:nvPr>
             <p:extLst>
               <p:ext uri="{D42A27DB-BD31-4B8C-83A1-F6EECF244321}">
-                <p14:modId xmlns:p14="http://schemas.microsoft.com/office/powerpoint/2010/main" val="592606401"/>
+                <p14:modId xmlns:p14="http://schemas.microsoft.com/office/powerpoint/2010/main" val="2888937245"/>
               </p:ext>
             </p:extLst>
           </p:nvPr>
@@ -14947,7 +14959,7 @@
         <p:spPr>
           <a:xfrm>
             <a:off x="548640" y="1325880"/>
-            <a:ext cx="11064240" cy="457200"/>
+            <a:ext cx="11091672" cy="457200"/>
           </a:xfrm>
           <a:prstGeom prst="rect">
             <a:avLst/>
@@ -15260,15 +15272,39 @@
           </a:p>
         </p:txBody>
       </p:sp>
-      <p:sp>
-        <p:nvSpPr>
-          <p:cNvPr id="9" name="Text 7"/>
+      <p:pic>
+        <p:nvPicPr>
+          <p:cNvPr id="9" name="col_img_1" descr="C:\Users\Chingu\AppData\Local\Temp\claude\C--Users-Chingu-Desktop-ACADEMIASEULWEB\d4111e1b-5523-44ea-97b2-b1a1d9545b9e\scratchpad\decks\cache\img_6bff3c2511e0fb77.png"/>
+          <p:cNvPicPr>
+            <a:picLocks noChangeAspect="1"/>
+          </p:cNvPicPr>
+          <p:nvPr/>
+        </p:nvPicPr>
+        <p:blipFill>
+          <a:blip r:embed="rId3"/>
+          <a:stretch>
+            <a:fillRect/>
+          </a:stretch>
+        </p:blipFill>
+        <p:spPr>
+          <a:xfrm>
+            <a:off x="8193024" y="2651760"/>
+            <a:ext cx="1508760" cy="685800"/>
+          </a:xfrm>
+          <a:prstGeom prst="rect">
+            <a:avLst/>
+          </a:prstGeom>
+        </p:spPr>
+      </p:pic>
+      <p:sp>
+        <p:nvSpPr>
+          <p:cNvPr id="10" name="Text 7"/>
           <p:cNvSpPr txBox="1"/>
           <p:nvPr/>
         </p:nvSpPr>
         <p:spPr>
           <a:xfrm>
-            <a:off x="6483096" y="2651760"/>
+            <a:off x="6483096" y="3429000"/>
             <a:ext cx="4928616" cy="914400"/>
           </a:xfrm>
           <a:prstGeom prst="rect">
@@ -15303,14 +15339,14 @@
       </p:sp>
       <p:sp>
         <p:nvSpPr>
-          <p:cNvPr id="10" name="lista"/>
+          <p:cNvPr id="11" name="lista"/>
           <p:cNvSpPr txBox="1"/>
           <p:nvPr/>
         </p:nvSpPr>
         <p:spPr>
           <a:xfrm>
-            <a:off x="6437376" y="3657600"/>
-            <a:ext cx="5020056" cy="2377440"/>
+            <a:off x="6437376" y="4434840"/>
+            <a:ext cx="5020056" cy="1600200"/>
           </a:xfrm>
           <a:prstGeom prst="rect">
             <a:avLst/>
@@ -15332,7 +15368,7 @@
               <a:buChar char="•"/>
             </a:pPr>
             <a:r>
-              <a:rPr lang="ko-KR" altLang="en-US" sz="2000" dirty="0">
+              <a:rPr lang="ko-KR" altLang="en-US" sz="1200" dirty="0">
                 <a:solidFill>
                   <a:srgbClr val="14142B"/>
                 </a:solidFill>
@@ -15343,7 +15379,7 @@
               <a:t>11월 </a:t>
             </a:r>
             <a:r>
-              <a:rPr lang="en-US" sz="2000" dirty="0">
+              <a:rPr lang="en-US" sz="1200" dirty="0">
                 <a:solidFill>
                   <a:srgbClr val="14142B"/>
                 </a:solidFill>
@@ -15351,7 +15387,7 @@
               <a:t>6</a:t>
             </a:r>
             <a:r>
-              <a:rPr lang="ko-KR" altLang="en-US" sz="2000" dirty="0">
+              <a:rPr lang="ko-KR" altLang="en-US" sz="1200" dirty="0">
                 <a:solidFill>
                   <a:srgbClr val="14142B"/>
                 </a:solidFill>
@@ -15362,7 +15398,7 @@
               <a:t>일 </a:t>
             </a:r>
             <a:r>
-              <a:rPr lang="en-US" sz="2000" dirty="0">
+              <a:rPr lang="en-US" sz="1200" dirty="0">
                 <a:solidFill>
                   <a:srgbClr val="14142B"/>
                 </a:solidFill>
@@ -15370,7 +15406,7 @@
               <a:t>(</a:t>
             </a:r>
             <a:r>
-              <a:rPr lang="ko-KR" altLang="en-US" sz="2000" dirty="0">
+              <a:rPr lang="ko-KR" altLang="en-US" sz="1200" dirty="0">
                 <a:solidFill>
                   <a:srgbClr val="14142B"/>
                 </a:solidFill>
@@ -15381,7 +15417,7 @@
               <a:t>금</a:t>
             </a:r>
             <a:r>
-              <a:rPr lang="en-US" sz="2000" dirty="0">
+              <a:rPr lang="en-US" sz="1200" dirty="0">
                 <a:solidFill>
                   <a:srgbClr val="14142B"/>
                 </a:solidFill>
@@ -15389,7 +15425,7 @@
               <a:t>) · </a:t>
             </a:r>
             <a:r>
-              <a:rPr lang="ko-KR" altLang="en-US" sz="2000" dirty="0">
+              <a:rPr lang="ko-KR" altLang="en-US" sz="1200" dirty="0">
                 <a:solidFill>
                   <a:srgbClr val="14142B"/>
                 </a:solidFill>
@@ -15400,7 +15436,7 @@
               <a:t>저녁 </a:t>
             </a:r>
             <a:r>
-              <a:rPr lang="en-US" sz="2000" dirty="0">
+              <a:rPr lang="en-US" sz="1200" dirty="0">
                 <a:solidFill>
                   <a:srgbClr val="14142B"/>
                 </a:solidFill>
@@ -15408,7 +15444,7 @@
               <a:t>7</a:t>
             </a:r>
             <a:r>
-              <a:rPr lang="ko-KR" altLang="en-US" sz="2000" dirty="0">
+              <a:rPr lang="ko-KR" altLang="en-US" sz="1200" dirty="0">
                 <a:solidFill>
                   <a:srgbClr val="14142B"/>
                 </a:solidFill>
@@ -15419,7 +15455,7 @@
               <a:t>시 </a:t>
             </a:r>
             <a:r>
-              <a:rPr lang="en-US" sz="2000" dirty="0">
+              <a:rPr lang="en-US" sz="1200" dirty="0">
                 <a:solidFill>
                   <a:srgbClr val="14142B"/>
                 </a:solidFill>
@@ -15427,7 +15463,7 @@
               <a:t>· </a:t>
             </a:r>
             <a:r>
-              <a:rPr lang="ko-KR" altLang="en-US" sz="2000" dirty="0">
+              <a:rPr lang="ko-KR" altLang="en-US" sz="1200" dirty="0">
                 <a:solidFill>
                   <a:srgbClr val="14142B"/>
                 </a:solidFill>
@@ -15437,7 +15473,7 @@
               </a:rPr>
               <a:t>카페 서울</a:t>
             </a:r>
-            <a:endParaRPr lang="en-US" sz="2000" dirty="0"/>
+            <a:endParaRPr lang="en-US" sz="1200" dirty="0"/>
           </a:p>
           <a:p>
             <a:pPr marL="228600" indent="-228600" eaLnBrk="1">
@@ -15448,7 +15484,7 @@
               <a:buChar char="•"/>
             </a:pPr>
             <a:r>
-              <a:rPr lang="ko-KR" altLang="en-US" sz="2000" dirty="0">
+              <a:rPr lang="ko-KR" altLang="en-US" sz="1200" dirty="0">
                 <a:solidFill>
                   <a:srgbClr val="14142B"/>
                 </a:solidFill>
@@ -15458,7 +15494,7 @@
               </a:rPr>
               <a:t>맞지 않는 것을 고르십시오</a:t>
             </a:r>
-            <a:endParaRPr lang="en-US" sz="2000" dirty="0"/>
+            <a:endParaRPr lang="en-US" sz="1200" dirty="0"/>
           </a:p>
           <a:p>
             <a:pPr marL="228600" indent="-228600" eaLnBrk="1">
@@ -15469,7 +15505,7 @@
               <a:buChar char="•"/>
             </a:pPr>
             <a:r>
-              <a:rPr lang="ko-KR" altLang="en-US" sz="2000" dirty="0">
+              <a:rPr lang="ko-KR" altLang="en-US" sz="1200" dirty="0">
                 <a:solidFill>
                   <a:srgbClr val="14142B"/>
                 </a:solidFill>
@@ -15480,14 +15516,14 @@
               <a:t>① 지수 씨 생일이에요</a:t>
             </a:r>
             <a:r>
-              <a:rPr lang="en-US" sz="2000" dirty="0">
+              <a:rPr lang="en-US" sz="1200" dirty="0">
                 <a:solidFill>
                   <a:srgbClr val="14142B"/>
                 </a:solidFill>
               </a:rPr>
               <a:t>.</a:t>
             </a:r>
-            <a:endParaRPr lang="en-US" sz="2000" dirty="0"/>
+            <a:endParaRPr lang="en-US" sz="1200" dirty="0"/>
           </a:p>
           <a:p>
             <a:pPr marL="228600" indent="-228600" eaLnBrk="1">
@@ -15498,7 +15534,7 @@
               <a:buChar char="•"/>
             </a:pPr>
             <a:r>
-              <a:rPr lang="ko-KR" altLang="en-US" sz="2000" dirty="0">
+              <a:rPr lang="ko-KR" altLang="en-US" sz="1200" dirty="0">
                 <a:solidFill>
                   <a:srgbClr val="14142B"/>
                 </a:solidFill>
@@ -15509,14 +15545,14 @@
               <a:t>② 십일월 육 일이에요</a:t>
             </a:r>
             <a:r>
-              <a:rPr lang="en-US" sz="2000" dirty="0">
+              <a:rPr lang="en-US" sz="1200" dirty="0">
                 <a:solidFill>
                   <a:srgbClr val="14142B"/>
                 </a:solidFill>
               </a:rPr>
               <a:t>.</a:t>
             </a:r>
-            <a:endParaRPr lang="en-US" sz="2000" dirty="0"/>
+            <a:endParaRPr lang="en-US" sz="1200" dirty="0"/>
           </a:p>
           <a:p>
             <a:pPr marL="228600" indent="-228600" eaLnBrk="1">
@@ -15527,7 +15563,7 @@
               <a:buChar char="•"/>
             </a:pPr>
             <a:r>
-              <a:rPr lang="ko-KR" altLang="en-US" sz="2000" dirty="0">
+              <a:rPr lang="ko-KR" altLang="en-US" sz="1200" dirty="0">
                 <a:solidFill>
                   <a:srgbClr val="14142B"/>
                 </a:solidFill>
@@ -15538,14 +15574,14 @@
               <a:t>③ 금요일이에요</a:t>
             </a:r>
             <a:r>
-              <a:rPr lang="en-US" sz="2000" dirty="0">
+              <a:rPr lang="en-US" sz="1200" dirty="0">
                 <a:solidFill>
                   <a:srgbClr val="14142B"/>
                 </a:solidFill>
               </a:rPr>
               <a:t>.</a:t>
             </a:r>
-            <a:endParaRPr lang="en-US" sz="2000" dirty="0"/>
+            <a:endParaRPr lang="en-US" sz="1200" dirty="0"/>
           </a:p>
           <a:p>
             <a:pPr marL="228600" indent="-228600" eaLnBrk="1">
@@ -15556,7 +15592,7 @@
               <a:buChar char="•"/>
             </a:pPr>
             <a:r>
-              <a:rPr lang="ko-KR" altLang="en-US" sz="2000" dirty="0">
+              <a:rPr lang="ko-KR" altLang="en-US" sz="1200" dirty="0">
                 <a:solidFill>
                   <a:srgbClr val="14142B"/>
                 </a:solidFill>
@@ -15564,17 +15600,17 @@
                 <a:ea typeface="Malgun Gothic" pitchFamily="34" charset="-122"/>
                 <a:cs typeface="Malgun Gothic" pitchFamily="34" charset="-120"/>
               </a:rPr>
-              <a:t>④ 오전 일곱 시예요</a:t>
-            </a:r>
-            <a:r>
-              <a:rPr lang="en-US" sz="2000" dirty="0">
+              <a:t>④ 오전 일곱 시예요</a:t>
+            </a:r>
+            <a:r>
+              <a:rPr lang="en-US" sz="1200" dirty="0">
                 <a:solidFill>
                   <a:srgbClr val="14142B"/>
                 </a:solidFill>
               </a:rPr>
               <a:t>.</a:t>
             </a:r>
-            <a:endParaRPr lang="en-US" sz="2000" dirty="0"/>
+            <a:endParaRPr lang="en-US" sz="1200" dirty="0"/>
           </a:p>
         </p:txBody>
       </p:sp>
@@ -15708,7 +15744,7 @@
         <p:spPr>
           <a:xfrm>
             <a:off x="548640" y="1325880"/>
-            <a:ext cx="11064240" cy="548640"/>
+            <a:ext cx="11091672" cy="548640"/>
           </a:xfrm>
           <a:prstGeom prst="rect">
             <a:avLst/>
@@ -15877,7 +15913,7 @@
         <p:spPr>
           <a:xfrm>
             <a:off x="1188720" y="1965960"/>
-            <a:ext cx="4462272" cy="594360"/>
+            <a:ext cx="4898989" cy="594360"/>
           </a:xfrm>
           <a:prstGeom prst="rect">
             <a:avLst/>
@@ -15914,8 +15950,8 @@
         </p:nvSpPr>
         <p:spPr>
           <a:xfrm>
-            <a:off x="5879592" y="2002536"/>
-            <a:ext cx="5760720" cy="521208"/>
+            <a:off x="6316309" y="2002536"/>
+            <a:ext cx="5324003" cy="521208"/>
           </a:xfrm>
           <a:prstGeom prst="roundRect">
             <a:avLst>
@@ -15941,8 +15977,8 @@
         </p:nvSpPr>
         <p:spPr>
           <a:xfrm>
-            <a:off x="5971032" y="2002536"/>
-            <a:ext cx="5577840" cy="521208"/>
+            <a:off x="6407749" y="2002536"/>
+            <a:ext cx="5141123" cy="521208"/>
           </a:xfrm>
           <a:prstGeom prst="rect">
             <a:avLst/>
@@ -16054,7 +16090,7 @@
         <p:spPr>
           <a:xfrm>
             <a:off x="1188720" y="2688336"/>
-            <a:ext cx="4462272" cy="594360"/>
+            <a:ext cx="4898989" cy="594360"/>
           </a:xfrm>
           <a:prstGeom prst="rect">
             <a:avLst/>
@@ -16091,8 +16127,8 @@
         </p:nvSpPr>
         <p:spPr>
           <a:xfrm>
-            <a:off x="5879592" y="2724912"/>
-            <a:ext cx="5760720" cy="521208"/>
+            <a:off x="6316309" y="2724912"/>
+            <a:ext cx="5324003" cy="521208"/>
           </a:xfrm>
           <a:prstGeom prst="roundRect">
             <a:avLst>
@@ -16118,8 +16154,8 @@
         </p:nvSpPr>
         <p:spPr>
           <a:xfrm>
-            <a:off x="5971032" y="2724912"/>
-            <a:ext cx="5577840" cy="521208"/>
+            <a:off x="6407749" y="2724912"/>
+            <a:ext cx="5141123" cy="521208"/>
           </a:xfrm>
           <a:prstGeom prst="rect">
             <a:avLst/>
@@ -16231,7 +16267,7 @@
         <p:spPr>
           <a:xfrm>
             <a:off x="1188720" y="3410712"/>
-            <a:ext cx="4462272" cy="594360"/>
+            <a:ext cx="4898989" cy="594360"/>
           </a:xfrm>
           <a:prstGeom prst="rect">
             <a:avLst/>
@@ -16268,8 +16304,8 @@
         </p:nvSpPr>
         <p:spPr>
           <a:xfrm>
-            <a:off x="5879592" y="3447288"/>
-            <a:ext cx="5760720" cy="521208"/>
+            <a:off x="6316309" y="3447288"/>
+            <a:ext cx="5324003" cy="521208"/>
           </a:xfrm>
           <a:prstGeom prst="roundRect">
             <a:avLst>
@@ -16295,8 +16331,8 @@
         </p:nvSpPr>
         <p:spPr>
           <a:xfrm>
-            <a:off x="5971032" y="3447288"/>
-            <a:ext cx="5577840" cy="521208"/>
+            <a:off x="6407749" y="3447288"/>
+            <a:ext cx="5141123" cy="521208"/>
           </a:xfrm>
           <a:prstGeom prst="rect">
             <a:avLst/>
@@ -16314,7 +16350,7 @@
               <a:buNone/>
             </a:pPr>
             <a:r>
-              <a:rPr lang="ko-KR" altLang="en-US" sz="1900" b="1" dirty="0">
+              <a:rPr lang="ko-KR" altLang="en-US" sz="1800" b="1" dirty="0">
                 <a:solidFill>
                   <a:srgbClr val="FFFFFF"/>
                 </a:solidFill>
@@ -16325,14 +16361,14 @@
               <a:t>A · 카페에서 공부해요</a:t>
             </a:r>
             <a:r>
-              <a:rPr lang="en-US" sz="1900" b="1" dirty="0">
+              <a:rPr lang="en-US" sz="1800" b="1" dirty="0">
                 <a:solidFill>
                   <a:srgbClr val="FFFFFF"/>
                 </a:solidFill>
               </a:rPr>
               <a:t>? · a un compañero</a:t>
             </a:r>
-            <a:endParaRPr lang="en-US" sz="1900" dirty="0"/>
+            <a:endParaRPr lang="en-US" sz="1800" dirty="0"/>
           </a:p>
         </p:txBody>
       </p:sp>
@@ -16408,7 +16444,7 @@
         <p:spPr>
           <a:xfrm>
             <a:off x="1188720" y="4133088"/>
-            <a:ext cx="4462272" cy="594360"/>
+            <a:ext cx="4898989" cy="594360"/>
           </a:xfrm>
           <a:prstGeom prst="rect">
             <a:avLst/>
@@ -16445,8 +16481,8 @@
         </p:nvSpPr>
         <p:spPr>
           <a:xfrm>
-            <a:off x="5879592" y="4169664"/>
-            <a:ext cx="5760720" cy="521208"/>
+            <a:off x="6316309" y="4169664"/>
+            <a:ext cx="5324003" cy="521208"/>
           </a:xfrm>
           <a:prstGeom prst="roundRect">
             <a:avLst>
@@ -16472,8 +16508,8 @@
         </p:nvSpPr>
         <p:spPr>
           <a:xfrm>
-            <a:off x="5971032" y="4169664"/>
-            <a:ext cx="5577840" cy="521208"/>
+            <a:off x="6407749" y="4169664"/>
+            <a:ext cx="5141123" cy="521208"/>
           </a:xfrm>
           <a:prstGeom prst="rect">
             <a:avLst/>
@@ -16491,7 +16527,7 @@
               <a:buNone/>
             </a:pPr>
             <a:r>
-              <a:rPr lang="ko-KR" altLang="en-US" sz="1600" b="1" dirty="0">
+              <a:rPr lang="ko-KR" altLang="en-US" sz="1500" b="1" dirty="0">
                 <a:solidFill>
                   <a:srgbClr val="FFFFFF"/>
                 </a:solidFill>
@@ -16502,14 +16538,14 @@
               <a:t>F · 오늘 서울은 춥습니다</a:t>
             </a:r>
             <a:r>
-              <a:rPr lang="en-US" sz="1600" b="1" dirty="0">
+              <a:rPr lang="en-US" sz="1500" b="1" dirty="0">
                 <a:solidFill>
                   <a:srgbClr val="FFFFFF"/>
                 </a:solidFill>
               </a:rPr>
               <a:t>. · noticias del tiempo</a:t>
             </a:r>
-            <a:endParaRPr lang="en-US" sz="1600" dirty="0"/>
+            <a:endParaRPr lang="en-US" sz="1500" dirty="0"/>
           </a:p>
         </p:txBody>
       </p:sp>
@@ -16585,7 +16621,7 @@
         <p:spPr>
           <a:xfrm>
             <a:off x="1188720" y="4855464"/>
-            <a:ext cx="4462272" cy="594360"/>
+            <a:ext cx="4898989" cy="594360"/>
           </a:xfrm>
           <a:prstGeom prst="rect">
             <a:avLst/>
@@ -16622,8 +16658,8 @@
         </p:nvSpPr>
         <p:spPr>
           <a:xfrm>
-            <a:off x="5879592" y="4892040"/>
-            <a:ext cx="5760720" cy="521208"/>
+            <a:off x="6316309" y="4892040"/>
+            <a:ext cx="5324003" cy="521208"/>
           </a:xfrm>
           <a:prstGeom prst="roundRect">
             <a:avLst>
@@ -16649,8 +16685,8 @@
         </p:nvSpPr>
         <p:spPr>
           <a:xfrm>
-            <a:off x="5971032" y="4892040"/>
-            <a:ext cx="5577840" cy="521208"/>
+            <a:off x="6407749" y="4892040"/>
+            <a:ext cx="5141123" cy="521208"/>
           </a:xfrm>
           <a:prstGeom prst="rect">
             <a:avLst/>
@@ -16676,7 +16712,7 @@
                 <a:ea typeface="Malgun Gothic" pitchFamily="34" charset="-122"/>
                 <a:cs typeface="Malgun Gothic" pitchFamily="34" charset="-120"/>
               </a:rPr>
-              <a:t>A · 보통 일곱 시쯤 일어나요</a:t>
+              <a:t>A · 보통 일곱 시쯤 일어나요</a:t>
             </a:r>
             <a:r>
               <a:rPr lang="en-US" sz="1500" b="1" dirty="0">
@@ -16762,7 +16798,7 @@
         <p:spPr>
           <a:xfrm>
             <a:off x="1188720" y="5577840"/>
-            <a:ext cx="4462272" cy="594360"/>
+            <a:ext cx="4898989" cy="594360"/>
           </a:xfrm>
           <a:prstGeom prst="rect">
             <a:avLst/>
@@ -16799,8 +16835,8 @@
         </p:nvSpPr>
         <p:spPr>
           <a:xfrm>
-            <a:off x="5879592" y="5614416"/>
-            <a:ext cx="5760720" cy="521208"/>
+            <a:off x="6316309" y="5614416"/>
+            <a:ext cx="5324003" cy="521208"/>
           </a:xfrm>
           <a:prstGeom prst="roundRect">
             <a:avLst>
@@ -16826,8 +16862,8 @@
         </p:nvSpPr>
         <p:spPr>
           <a:xfrm>
-            <a:off x="5971032" y="5614416"/>
-            <a:ext cx="5577840" cy="521208"/>
+            <a:off x="6407749" y="5614416"/>
+            <a:ext cx="5141123" cy="521208"/>
           </a:xfrm>
           <a:prstGeom prst="rect">
             <a:avLst/>
@@ -17624,8 +17660,8 @@
         </p:nvSpPr>
         <p:spPr>
           <a:xfrm>
-            <a:off x="1463040" y="3657600"/>
-            <a:ext cx="9262872" cy="822960"/>
+            <a:off x="1783080" y="3657600"/>
+            <a:ext cx="8439912" cy="822960"/>
           </a:xfrm>
           <a:prstGeom prst="rect">
             <a:avLst/>
@@ -17855,7 +17891,7 @@
                 <a:ea typeface="Malgun Gothic" pitchFamily="34" charset="-122"/>
                 <a:cs typeface="Malgun Gothic" pitchFamily="34" charset="-120"/>
               </a:rPr>
-              <a:t>아홉 시에 출근해요  </a:t>
+              <a:t>아홉 시에 출근해요  </a:t>
             </a:r>
             <a:r>
               <a:rPr lang="en-US" sz="2200" b="1" dirty="0">
@@ -17886,7 +17922,7 @@
         <p:spPr>
           <a:xfrm>
             <a:off x="548640" y="1325880"/>
-            <a:ext cx="6949440" cy="548640"/>
+            <a:ext cx="5669280" cy="548640"/>
           </a:xfrm>
           <a:prstGeom prst="rect">
             <a:avLst/>
@@ -17924,7 +17960,7 @@
         <p:spPr>
           <a:xfrm>
             <a:off x="548640" y="1965960"/>
-            <a:ext cx="6949440" cy="4206240"/>
+            <a:ext cx="5669280" cy="4206240"/>
           </a:xfrm>
           <a:prstGeom prst="rect">
             <a:avLst/>
@@ -17975,7 +18011,7 @@
                 <a:ea typeface="Malgun Gothic" pitchFamily="34" charset="-122"/>
                 <a:cs typeface="Malgun Gothic" pitchFamily="34" charset="-120"/>
               </a:rPr>
-              <a:t>아홉 시에 출근해요</a:t>
+              <a:t>아홉 시에 출근해요</a:t>
             </a:r>
             <a:r>
               <a:rPr lang="en-US" sz="2400" dirty="0">
@@ -17994,7 +18030,7 @@
                 <a:ea typeface="Malgun Gothic" pitchFamily="34" charset="-122"/>
                 <a:cs typeface="Malgun Gothic" pitchFamily="34" charset="-120"/>
               </a:rPr>
-              <a:t>여섯 시에 퇴근해요</a:t>
+              <a:t>여섯 시에 퇴근해요</a:t>
             </a:r>
             <a:r>
               <a:rPr lang="en-US" sz="2400" dirty="0">
@@ -18095,12 +18131,12 @@
         </p:nvSpPr>
         <p:spPr>
           <a:xfrm>
-            <a:off x="8001000" y="1417320"/>
-            <a:ext cx="3611880" cy="4480560"/>
+            <a:off x="6446520" y="1371600"/>
+            <a:ext cx="5193792" cy="4800600"/>
           </a:xfrm>
           <a:prstGeom prst="roundRect">
             <a:avLst>
-              <a:gd name="adj" fmla="val 6329"/>
+              <a:gd name="adj" fmla="val 4762"/>
             </a:avLst>
           </a:prstGeom>
           <a:solidFill>
@@ -18114,64 +18150,30 @@
           </a:ln>
         </p:spPr>
       </p:sp>
-      <p:sp>
-        <p:nvSpPr>
-          <p:cNvPr id="6" name="ko_grande"/>
-          <p:cNvSpPr txBox="1"/>
-          <p:nvPr/>
-        </p:nvSpPr>
-        <p:spPr>
-          <a:xfrm>
-            <a:off x="8092440" y="1874520"/>
-            <a:ext cx="3429000" cy="2926080"/>
+      <p:pic>
+        <p:nvPicPr>
+          <p:cNvPr id="6" name="imagen" descr="C:\Users\Chingu\AppData\Local\Temp\claude\C--Users-Chingu-Desktop-ACADEMIASEULWEB\d4111e1b-5523-44ea-97b2-b1a1d9545b9e\scratchpad\decks\cache\img_9cca462b5b702ec4.png"/>
+          <p:cNvPicPr>
+            <a:picLocks noChangeAspect="1"/>
+          </p:cNvPicPr>
+          <p:nvPr/>
+        </p:nvPicPr>
+        <p:blipFill>
+          <a:blip r:embed="rId3"/>
+          <a:stretch>
+            <a:fillRect/>
+          </a:stretch>
+        </p:blipFill>
+        <p:spPr>
+          <a:xfrm>
+            <a:off x="7040833" y="1463040"/>
+            <a:ext cx="4005165" cy="4617720"/>
           </a:xfrm>
           <a:prstGeom prst="rect">
             <a:avLst/>
           </a:prstGeom>
-          <a:noFill/>
-          <a:ln/>
-        </p:spPr>
-        <p:txBody>
-          <a:bodyPr wrap="square" lIns="0" tIns="0" rIns="0" bIns="0" rtlCol="0" anchor="ctr">
-            <a:normAutofit/>
-          </a:bodyPr>
-          <a:lstStyle/>
-          <a:p>
-            <a:pPr marL="0" indent="0" algn="ctr" eaLnBrk="1">
-              <a:buNone/>
-            </a:pPr>
-            <a:r>
-              <a:rPr lang="ko-KR" altLang="en-US" sz="5400" b="1" dirty="0">
-                <a:solidFill>
-                  <a:srgbClr val="4236F6"/>
-                </a:solidFill>
-                <a:latin typeface="Malgun Gothic" pitchFamily="34" charset="0"/>
-                <a:ea typeface="Malgun Gothic" pitchFamily="34" charset="-122"/>
-                <a:cs typeface="Malgun Gothic" pitchFamily="34" charset="-120"/>
-              </a:rPr>
-              <a:t>아홉 시에</a:t>
-            </a:r>
-            <a:endParaRPr lang="en-US" sz="5400" dirty="0"/>
-          </a:p>
-          <a:p>
-            <a:pPr marL="0" indent="0" algn="ctr" eaLnBrk="1">
-              <a:buNone/>
-            </a:pPr>
-            <a:r>
-              <a:rPr lang="ko-KR" altLang="en-US" sz="5400" b="1" dirty="0">
-                <a:solidFill>
-                  <a:srgbClr val="4236F6"/>
-                </a:solidFill>
-                <a:latin typeface="Malgun Gothic" pitchFamily="34" charset="0"/>
-                <a:ea typeface="Malgun Gothic" pitchFamily="34" charset="-122"/>
-                <a:cs typeface="Malgun Gothic" pitchFamily="34" charset="-120"/>
-              </a:rPr>
-              <a:t>출근해요</a:t>
-            </a:r>
-            <a:endParaRPr lang="en-US" sz="5400" dirty="0"/>
-          </a:p>
-        </p:txBody>
-      </p:sp>
+        </p:spPr>
+      </p:pic>
       <p:sp>
         <p:nvSpPr>
           <p:cNvPr id="25" name="Slide Number Placeholder 0"/>
@@ -18302,7 +18304,7 @@
         <p:spPr>
           <a:xfrm>
             <a:off x="548640" y="1325880"/>
-            <a:ext cx="11064240" cy="548640"/>
+            <a:ext cx="11091672" cy="548640"/>
           </a:xfrm>
           <a:prstGeom prst="rect">
             <a:avLst/>
@@ -19788,7 +19790,7 @@
         <p:spPr>
           <a:xfrm>
             <a:off x="548640" y="1325880"/>
-            <a:ext cx="11064240" cy="548640"/>
+            <a:ext cx="11091672" cy="548640"/>
           </a:xfrm>
           <a:prstGeom prst="rect">
             <a:avLst/>
@@ -21274,7 +21276,7 @@
         <p:spPr>
           <a:xfrm>
             <a:off x="548640" y="1325880"/>
-            <a:ext cx="11064240" cy="548640"/>
+            <a:ext cx="11091672" cy="548640"/>
           </a:xfrm>
           <a:prstGeom prst="rect">
             <a:avLst/>
@@ -22760,7 +22762,7 @@
         <p:spPr>
           <a:xfrm>
             <a:off x="548640" y="1325880"/>
-            <a:ext cx="11064240" cy="548640"/>
+            <a:ext cx="11091672" cy="548640"/>
           </a:xfrm>
           <a:prstGeom prst="rect">
             <a:avLst/>
@@ -24882,7 +24884,7 @@
               <a:buChar char="•"/>
             </a:pPr>
             <a:r>
-              <a:rPr lang="ko-KR" altLang="en-US" sz="2400" dirty="0">
+              <a:rPr lang="ko-KR" altLang="en-US" sz="2800" dirty="0">
                 <a:solidFill>
                   <a:srgbClr val="14142B"/>
                 </a:solidFill>
@@ -24893,14 +24895,14 @@
               <a:t>보통 몇 시에 일어나요</a:t>
             </a:r>
             <a:r>
-              <a:rPr lang="en-US" sz="2400" dirty="0">
+              <a:rPr lang="en-US" sz="2800" dirty="0">
                 <a:solidFill>
                   <a:srgbClr val="14142B"/>
                 </a:solidFill>
               </a:rPr>
               <a:t>?</a:t>
             </a:r>
-            <a:endParaRPr lang="en-US" sz="2400" dirty="0"/>
+            <a:endParaRPr lang="en-US" sz="2800" dirty="0"/>
           </a:p>
           <a:p>
             <a:pPr marL="228600" indent="-228600" eaLnBrk="1">
@@ -24911,7 +24913,7 @@
               <a:buChar char="•"/>
             </a:pPr>
             <a:r>
-              <a:rPr lang="ko-KR" altLang="en-US" sz="2400" dirty="0">
+              <a:rPr lang="ko-KR" altLang="en-US" sz="2800" dirty="0">
                 <a:solidFill>
                   <a:srgbClr val="14142B"/>
                 </a:solidFill>
@@ -24922,14 +24924,14 @@
               <a:t>요즘 바빠요</a:t>
             </a:r>
             <a:r>
-              <a:rPr lang="en-US" sz="2400" dirty="0">
+              <a:rPr lang="en-US" sz="2800" dirty="0">
                 <a:solidFill>
                   <a:srgbClr val="14142B"/>
                 </a:solidFill>
               </a:rPr>
               <a:t>?</a:t>
             </a:r>
-            <a:endParaRPr lang="en-US" sz="2400" dirty="0"/>
+            <a:endParaRPr lang="en-US" sz="2800" dirty="0"/>
           </a:p>
           <a:p>
             <a:pPr marL="228600" indent="-228600" eaLnBrk="1">
@@ -24940,7 +24942,7 @@
               <a:buChar char="•"/>
             </a:pPr>
             <a:r>
-              <a:rPr lang="ko-KR" altLang="en-US" sz="2400" dirty="0">
+              <a:rPr lang="ko-KR" altLang="en-US" sz="2800" dirty="0">
                 <a:solidFill>
                   <a:srgbClr val="14142B"/>
                 </a:solidFill>
@@ -24951,14 +24953,14 @@
               <a:t>생일이 언제예요</a:t>
             </a:r>
             <a:r>
-              <a:rPr lang="en-US" sz="2400" dirty="0">
+              <a:rPr lang="en-US" sz="2800" dirty="0">
                 <a:solidFill>
                   <a:srgbClr val="14142B"/>
                 </a:solidFill>
               </a:rPr>
               <a:t>?</a:t>
             </a:r>
-            <a:endParaRPr lang="en-US" sz="2400" dirty="0"/>
+            <a:endParaRPr lang="en-US" sz="2800" dirty="0"/>
           </a:p>
           <a:p>
             <a:pPr marL="228600" indent="-228600" eaLnBrk="1">
@@ -24969,7 +24971,7 @@
               <a:buChar char="•"/>
             </a:pPr>
             <a:r>
-              <a:rPr lang="ko-KR" altLang="en-US" sz="2400" dirty="0">
+              <a:rPr lang="ko-KR" altLang="en-US" sz="2800" dirty="0">
                 <a:solidFill>
                   <a:srgbClr val="14142B"/>
                 </a:solidFill>
@@ -24980,14 +24982,14 @@
               <a:t>Si no entiendes: 네</a:t>
             </a:r>
             <a:r>
-              <a:rPr lang="en-US" sz="2400" dirty="0">
+              <a:rPr lang="en-US" sz="2800" dirty="0">
                 <a:solidFill>
                   <a:srgbClr val="14142B"/>
                 </a:solidFill>
               </a:rPr>
               <a:t>?</a:t>
             </a:r>
-            <a:endParaRPr lang="en-US" sz="2400" dirty="0"/>
+            <a:endParaRPr lang="en-US" sz="2800" dirty="0"/>
           </a:p>
         </p:txBody>
       </p:sp>
@@ -25172,7 +25174,7 @@
         <p:spPr>
           <a:xfrm>
             <a:off x="548640" y="1325880"/>
-            <a:ext cx="11064240" cy="548640"/>
+            <a:ext cx="11091672" cy="548640"/>
           </a:xfrm>
           <a:prstGeom prst="rect">
             <a:avLst/>
@@ -25209,7 +25211,7 @@
         </p:nvSpPr>
         <p:spPr>
           <a:xfrm>
-            <a:off x="548640" y="2171700"/>
+            <a:off x="548640" y="2574950"/>
             <a:ext cx="457200" cy="457200"/>
           </a:xfrm>
           <a:prstGeom prst="ellipse">
@@ -25234,7 +25236,7 @@
         </p:nvSpPr>
         <p:spPr>
           <a:xfrm>
-            <a:off x="548640" y="2171700"/>
+            <a:off x="548640" y="2574950"/>
             <a:ext cx="457200" cy="457200"/>
           </a:xfrm>
           <a:prstGeom prst="rect">
@@ -25272,7 +25274,7 @@
         </p:nvSpPr>
         <p:spPr>
           <a:xfrm>
-            <a:off x="1188720" y="1965960"/>
+            <a:off x="1188720" y="2369210"/>
             <a:ext cx="6080760" cy="868680"/>
           </a:xfrm>
           <a:prstGeom prst="rect">
@@ -25321,7 +25323,7 @@
         </p:nvSpPr>
         <p:spPr>
           <a:xfrm>
-            <a:off x="7498080" y="2002536"/>
+            <a:off x="7498080" y="2405786"/>
             <a:ext cx="4142232" cy="795528"/>
           </a:xfrm>
           <a:prstGeom prst="roundRect">
@@ -25348,7 +25350,7 @@
         </p:nvSpPr>
         <p:spPr>
           <a:xfrm>
-            <a:off x="7589520" y="2002536"/>
+            <a:off x="7589520" y="2405786"/>
             <a:ext cx="3959352" cy="795528"/>
           </a:xfrm>
           <a:prstGeom prst="rect">
@@ -25389,7 +25391,7 @@
         </p:nvSpPr>
         <p:spPr>
           <a:xfrm>
-            <a:off x="548640" y="3168396"/>
+            <a:off x="548640" y="3571646"/>
             <a:ext cx="457200" cy="457200"/>
           </a:xfrm>
           <a:prstGeom prst="ellipse">
@@ -25414,7 +25416,7 @@
         </p:nvSpPr>
         <p:spPr>
           <a:xfrm>
-            <a:off x="548640" y="3168396"/>
+            <a:off x="548640" y="3571646"/>
             <a:ext cx="457200" cy="457200"/>
           </a:xfrm>
           <a:prstGeom prst="rect">
@@ -25452,7 +25454,7 @@
         </p:nvSpPr>
         <p:spPr>
           <a:xfrm>
-            <a:off x="1188720" y="2962656"/>
+            <a:off x="1188720" y="3365906"/>
             <a:ext cx="6080760" cy="868680"/>
           </a:xfrm>
           <a:prstGeom prst="rect">
@@ -25520,7 +25522,7 @@
         </p:nvSpPr>
         <p:spPr>
           <a:xfrm>
-            <a:off x="7498080" y="2999232"/>
+            <a:off x="7498080" y="3402482"/>
             <a:ext cx="4142232" cy="795528"/>
           </a:xfrm>
           <a:prstGeom prst="roundRect">
@@ -25547,7 +25549,7 @@
         </p:nvSpPr>
         <p:spPr>
           <a:xfrm>
-            <a:off x="7589520" y="2999232"/>
+            <a:off x="7589520" y="3402482"/>
             <a:ext cx="3959352" cy="795528"/>
           </a:xfrm>
           <a:prstGeom prst="rect">
@@ -25607,7 +25609,7 @@
         </p:nvSpPr>
         <p:spPr>
           <a:xfrm>
-            <a:off x="548640" y="4165092"/>
+            <a:off x="548640" y="4568342"/>
             <a:ext cx="457200" cy="457200"/>
           </a:xfrm>
           <a:prstGeom prst="ellipse">
@@ -25632,7 +25634,7 @@
         </p:nvSpPr>
         <p:spPr>
           <a:xfrm>
-            <a:off x="548640" y="4165092"/>
+            <a:off x="548640" y="4568342"/>
             <a:ext cx="457200" cy="457200"/>
           </a:xfrm>
           <a:prstGeom prst="rect">
@@ -25670,7 +25672,7 @@
         </p:nvSpPr>
         <p:spPr>
           <a:xfrm>
-            <a:off x="1188720" y="3959352"/>
+            <a:off x="1188720" y="4362602"/>
             <a:ext cx="6080760" cy="868680"/>
           </a:xfrm>
           <a:prstGeom prst="rect">
@@ -25719,7 +25721,7 @@
         </p:nvSpPr>
         <p:spPr>
           <a:xfrm>
-            <a:off x="7498080" y="3995928"/>
+            <a:off x="7498080" y="4399178"/>
             <a:ext cx="4142232" cy="795528"/>
           </a:xfrm>
           <a:prstGeom prst="roundRect">
@@ -25746,7 +25748,7 @@
         </p:nvSpPr>
         <p:spPr>
           <a:xfrm>
-            <a:off x="7589520" y="3995928"/>
+            <a:off x="7589520" y="4399178"/>
             <a:ext cx="3959352" cy="795528"/>
           </a:xfrm>
           <a:prstGeom prst="rect">
@@ -26187,7 +26189,7 @@
         <p:spPr>
           <a:xfrm>
             <a:off x="548640" y="1325880"/>
-            <a:ext cx="11064240" cy="548640"/>
+            <a:ext cx="11091672" cy="548640"/>
           </a:xfrm>
           <a:prstGeom prst="rect">
             <a:avLst/>
@@ -26288,7 +26290,7 @@
         <p:spPr>
           <a:xfrm>
             <a:off x="1188720" y="1965960"/>
-            <a:ext cx="4462272" cy="594360"/>
+            <a:ext cx="4898989" cy="594360"/>
           </a:xfrm>
           <a:prstGeom prst="rect">
             <a:avLst/>
@@ -26328,8 +26330,8 @@
         </p:nvSpPr>
         <p:spPr>
           <a:xfrm>
-            <a:off x="5879592" y="2002536"/>
-            <a:ext cx="5760720" cy="521208"/>
+            <a:off x="6316309" y="2002536"/>
+            <a:ext cx="5324003" cy="521208"/>
           </a:xfrm>
           <a:prstGeom prst="roundRect">
             <a:avLst>
@@ -26355,8 +26357,8 @@
         </p:nvSpPr>
         <p:spPr>
           <a:xfrm>
-            <a:off x="5971032" y="2002536"/>
-            <a:ext cx="5577840" cy="521208"/>
+            <a:off x="6407749" y="2002536"/>
+            <a:ext cx="5141123" cy="521208"/>
           </a:xfrm>
           <a:prstGeom prst="rect">
             <a:avLst/>
@@ -26382,7 +26384,7 @@
                 <a:ea typeface="Malgun Gothic" pitchFamily="34" charset="-122"/>
                 <a:cs typeface="Malgun Gothic" pitchFamily="34" charset="-120"/>
               </a:rPr>
-              <a:t>일곱 시 삼십 분 </a:t>
+              <a:t>일곱 시 삼십 분 </a:t>
             </a:r>
             <a:r>
               <a:rPr lang="en-US" sz="2200" b="1" dirty="0">
@@ -26401,7 +26403,7 @@
                 <a:ea typeface="Malgun Gothic" pitchFamily="34" charset="-122"/>
                 <a:cs typeface="Malgun Gothic" pitchFamily="34" charset="-120"/>
               </a:rPr>
-              <a:t>일곱 시 반</a:t>
+              <a:t>일곱 시 반</a:t>
             </a:r>
             <a:endParaRPr lang="en-US" sz="2200" dirty="0"/>
           </a:p>
@@ -26479,7 +26481,7 @@
         <p:spPr>
           <a:xfrm>
             <a:off x="1188720" y="2688336"/>
-            <a:ext cx="4462272" cy="594360"/>
+            <a:ext cx="4898989" cy="594360"/>
           </a:xfrm>
           <a:prstGeom prst="rect">
             <a:avLst/>
@@ -26497,7 +26499,7 @@
               <a:buNone/>
             </a:pPr>
             <a:r>
-              <a:rPr lang="ko-KR" altLang="en-US" sz="2400" dirty="0">
+              <a:rPr lang="ko-KR" altLang="en-US" sz="2000" dirty="0">
                 <a:solidFill>
                   <a:srgbClr val="14142B"/>
                 </a:solidFill>
@@ -26507,7 +26509,7 @@
               </a:rPr>
               <a:t>Tu amiga tiene 20 años: ___ 살</a:t>
             </a:r>
-            <a:endParaRPr lang="en-US" sz="2400" dirty="0"/>
+            <a:endParaRPr lang="en-US" sz="2000" dirty="0"/>
           </a:p>
         </p:txBody>
       </p:sp>
@@ -26519,8 +26521,8 @@
         </p:nvSpPr>
         <p:spPr>
           <a:xfrm>
-            <a:off x="5879592" y="2724912"/>
-            <a:ext cx="5760720" cy="521208"/>
+            <a:off x="6316309" y="2724912"/>
+            <a:ext cx="5324003" cy="521208"/>
           </a:xfrm>
           <a:prstGeom prst="roundRect">
             <a:avLst>
@@ -26546,8 +26548,8 @@
         </p:nvSpPr>
         <p:spPr>
           <a:xfrm>
-            <a:off x="5971032" y="2724912"/>
-            <a:ext cx="5577840" cy="521208"/>
+            <a:off x="6407749" y="2724912"/>
+            <a:ext cx="5141123" cy="521208"/>
           </a:xfrm>
           <a:prstGeom prst="rect">
             <a:avLst/>
@@ -26573,7 +26575,7 @@
                 <a:ea typeface="Malgun Gothic" pitchFamily="34" charset="-122"/>
                 <a:cs typeface="Malgun Gothic" pitchFamily="34" charset="-120"/>
               </a:rPr>
-              <a:t>스무 살 </a:t>
+              <a:t>스무 살 </a:t>
             </a:r>
             <a:r>
               <a:rPr lang="en-US" sz="2200" b="1" dirty="0">
@@ -26592,7 +26594,7 @@
                 <a:ea typeface="Malgun Gothic" pitchFamily="34" charset="-122"/>
                 <a:cs typeface="Malgun Gothic" pitchFamily="34" charset="-120"/>
               </a:rPr>
-              <a:t>스물 살</a:t>
+              <a:t>스물 살</a:t>
             </a:r>
             <a:r>
               <a:rPr lang="en-US" sz="2200" b="1" dirty="0">
@@ -26678,7 +26680,7 @@
         <p:spPr>
           <a:xfrm>
             <a:off x="1188720" y="3410712"/>
-            <a:ext cx="4462272" cy="594360"/>
+            <a:ext cx="4898989" cy="594360"/>
           </a:xfrm>
           <a:prstGeom prst="rect">
             <a:avLst/>
@@ -26737,8 +26739,8 @@
         </p:nvSpPr>
         <p:spPr>
           <a:xfrm>
-            <a:off x="5879592" y="3447288"/>
-            <a:ext cx="5760720" cy="521208"/>
+            <a:off x="6316309" y="3447288"/>
+            <a:ext cx="5324003" cy="521208"/>
           </a:xfrm>
           <a:prstGeom prst="roundRect">
             <a:avLst>
@@ -26764,8 +26766,8 @@
         </p:nvSpPr>
         <p:spPr>
           <a:xfrm>
-            <a:off x="5971032" y="3447288"/>
-            <a:ext cx="5577840" cy="521208"/>
+            <a:off x="6407749" y="3447288"/>
+            <a:ext cx="5141123" cy="521208"/>
           </a:xfrm>
           <a:prstGeom prst="rect">
             <a:avLst/>
@@ -26869,7 +26871,7 @@
         <p:spPr>
           <a:xfrm>
             <a:off x="1188720" y="4133088"/>
-            <a:ext cx="4462272" cy="594360"/>
+            <a:ext cx="4898989" cy="594360"/>
           </a:xfrm>
           <a:prstGeom prst="rect">
             <a:avLst/>
@@ -26917,8 +26919,8 @@
         </p:nvSpPr>
         <p:spPr>
           <a:xfrm>
-            <a:off x="5879592" y="4169664"/>
-            <a:ext cx="5760720" cy="521208"/>
+            <a:off x="6316309" y="4169664"/>
+            <a:ext cx="5324003" cy="521208"/>
           </a:xfrm>
           <a:prstGeom prst="roundRect">
             <a:avLst>
@@ -26944,8 +26946,8 @@
         </p:nvSpPr>
         <p:spPr>
           <a:xfrm>
-            <a:off x="5971032" y="4169664"/>
-            <a:ext cx="5577840" cy="521208"/>
+            <a:off x="6407749" y="4169664"/>
+            <a:ext cx="5141123" cy="521208"/>
           </a:xfrm>
           <a:prstGeom prst="rect">
             <a:avLst/>
@@ -27095,7 +27097,7 @@
         <p:spPr>
           <a:xfrm>
             <a:off x="1188720" y="4855464"/>
-            <a:ext cx="4462272" cy="594360"/>
+            <a:ext cx="4898989" cy="594360"/>
           </a:xfrm>
           <a:prstGeom prst="rect">
             <a:avLst/>
@@ -27113,7 +27115,7 @@
               <a:buNone/>
             </a:pPr>
             <a:r>
-              <a:rPr lang="ko-KR" altLang="en-US" sz="2400" dirty="0">
+              <a:rPr lang="ko-KR" altLang="en-US" sz="1900" dirty="0">
                 <a:solidFill>
                   <a:srgbClr val="14142B"/>
                 </a:solidFill>
@@ -27124,14 +27126,14 @@
               <a:t>지수 생일 파티</a:t>
             </a:r>
             <a:r>
-              <a:rPr lang="en-US" sz="2400" dirty="0">
+              <a:rPr lang="en-US" sz="1900" dirty="0">
                 <a:solidFill>
                   <a:srgbClr val="14142B"/>
                 </a:solidFill>
               </a:rPr>
               <a:t>: la que NO es correcta</a:t>
             </a:r>
-            <a:endParaRPr lang="en-US" sz="2400" dirty="0"/>
+            <a:endParaRPr lang="en-US" sz="1900" dirty="0"/>
           </a:p>
         </p:txBody>
       </p:sp>
@@ -27143,8 +27145,8 @@
         </p:nvSpPr>
         <p:spPr>
           <a:xfrm>
-            <a:off x="5879592" y="4892040"/>
-            <a:ext cx="5760720" cy="521208"/>
+            <a:off x="6316309" y="4892040"/>
+            <a:ext cx="5324003" cy="521208"/>
           </a:xfrm>
           <a:prstGeom prst="roundRect">
             <a:avLst>
@@ -27170,8 +27172,8 @@
         </p:nvSpPr>
         <p:spPr>
           <a:xfrm>
-            <a:off x="5971032" y="4892040"/>
-            <a:ext cx="5577840" cy="521208"/>
+            <a:off x="6407749" y="4892040"/>
+            <a:ext cx="5141123" cy="521208"/>
           </a:xfrm>
           <a:prstGeom prst="rect">
             <a:avLst/>
@@ -27189,7 +27191,7 @@
               <a:buNone/>
             </a:pPr>
             <a:r>
-              <a:rPr lang="ko-KR" altLang="en-US" sz="2000" b="1" dirty="0">
+              <a:rPr lang="ko-KR" altLang="en-US" sz="1800" b="1" dirty="0">
                 <a:solidFill>
                   <a:srgbClr val="FFFFFF"/>
                 </a:solidFill>
@@ -27197,10 +27199,10 @@
                 <a:ea typeface="Malgun Gothic" pitchFamily="34" charset="-122"/>
                 <a:cs typeface="Malgun Gothic" pitchFamily="34" charset="-120"/>
               </a:rPr>
-              <a:t>④ 오전 일곱 시예요 </a:t>
-            </a:r>
-            <a:r>
-              <a:rPr lang="en-US" sz="2000" b="1" dirty="0">
+              <a:t>④ 오전 일곱 시예요 </a:t>
+            </a:r>
+            <a:r>
+              <a:rPr lang="en-US" sz="1800" b="1" dirty="0">
                 <a:solidFill>
                   <a:srgbClr val="FFFFFF"/>
                 </a:solidFill>
@@ -27208,7 +27210,7 @@
               <a:t>(</a:t>
             </a:r>
             <a:r>
-              <a:rPr lang="ko-KR" altLang="en-US" sz="2000" b="1" dirty="0">
+              <a:rPr lang="ko-KR" altLang="en-US" sz="1800" b="1" dirty="0">
                 <a:solidFill>
                   <a:srgbClr val="FFFFFF"/>
                 </a:solidFill>
@@ -27219,7 +27221,7 @@
               <a:t>저녁 </a:t>
             </a:r>
             <a:r>
-              <a:rPr lang="en-US" sz="2000" b="1" dirty="0">
+              <a:rPr lang="en-US" sz="1800" b="1" dirty="0">
                 <a:solidFill>
                   <a:srgbClr val="FFFFFF"/>
                 </a:solidFill>
@@ -27227,7 +27229,7 @@
               <a:t>7</a:t>
             </a:r>
             <a:r>
-              <a:rPr lang="ko-KR" altLang="en-US" sz="2000" b="1" dirty="0">
+              <a:rPr lang="ko-KR" altLang="en-US" sz="1800" b="1" dirty="0">
                 <a:solidFill>
                   <a:srgbClr val="FFFFFF"/>
                 </a:solidFill>
@@ -27238,7 +27240,7 @@
               <a:t>시 </a:t>
             </a:r>
             <a:r>
-              <a:rPr lang="en-US" sz="2000" b="1" dirty="0">
+              <a:rPr lang="en-US" sz="1800" b="1" dirty="0">
                 <a:solidFill>
                   <a:srgbClr val="FFFFFF"/>
                 </a:solidFill>
@@ -27246,7 +27248,7 @@
               <a:t>no es </a:t>
             </a:r>
             <a:r>
-              <a:rPr lang="ko-KR" altLang="en-US" sz="2000" b="1" dirty="0">
+              <a:rPr lang="ko-KR" altLang="en-US" sz="1800" b="1" dirty="0">
                 <a:solidFill>
                   <a:srgbClr val="FFFFFF"/>
                 </a:solidFill>
@@ -27257,14 +27259,14 @@
               <a:t>오전</a:t>
             </a:r>
             <a:r>
-              <a:rPr lang="en-US" sz="2000" b="1" dirty="0">
+              <a:rPr lang="en-US" sz="1800" b="1" dirty="0">
                 <a:solidFill>
                   <a:srgbClr val="FFFFFF"/>
                 </a:solidFill>
               </a:rPr>
               <a:t>)</a:t>
             </a:r>
-            <a:endParaRPr lang="en-US" sz="2000" dirty="0"/>
+            <a:endParaRPr lang="en-US" sz="1800" dirty="0"/>
           </a:p>
         </p:txBody>
       </p:sp>
@@ -27340,7 +27342,7 @@
         <p:spPr>
           <a:xfrm>
             <a:off x="1188720" y="5577840"/>
-            <a:ext cx="4462272" cy="594360"/>
+            <a:ext cx="4898989" cy="594360"/>
           </a:xfrm>
           <a:prstGeom prst="rect">
             <a:avLst/>
@@ -27358,14 +27360,14 @@
               <a:buNone/>
             </a:pPr>
             <a:r>
-              <a:rPr lang="en-US" sz="2400" dirty="0">
+              <a:rPr lang="en-US" sz="1900" dirty="0">
                 <a:solidFill>
                   <a:srgbClr val="14142B"/>
                 </a:solidFill>
               </a:rPr>
               <a:t>Hoja 2 · errores frecuentes (sin nombres)</a:t>
             </a:r>
-            <a:endParaRPr lang="en-US" sz="2400" dirty="0"/>
+            <a:endParaRPr lang="en-US" sz="1900" dirty="0"/>
           </a:p>
         </p:txBody>
       </p:sp>
@@ -27377,8 +27379,8 @@
         </p:nvSpPr>
         <p:spPr>
           <a:xfrm>
-            <a:off x="5879592" y="5614416"/>
-            <a:ext cx="5760720" cy="521208"/>
+            <a:off x="6316309" y="5614416"/>
+            <a:ext cx="5324003" cy="521208"/>
           </a:xfrm>
           <a:prstGeom prst="roundRect">
             <a:avLst>
@@ -27404,8 +27406,8 @@
         </p:nvSpPr>
         <p:spPr>
           <a:xfrm>
-            <a:off x="5971032" y="5614416"/>
-            <a:ext cx="5577840" cy="521208"/>
+            <a:off x="6407749" y="5614416"/>
+            <a:ext cx="5141123" cy="521208"/>
           </a:xfrm>
           <a:prstGeom prst="rect">
             <a:avLst/>
@@ -27423,7 +27425,7 @@
               <a:buNone/>
             </a:pPr>
             <a:r>
-              <a:rPr lang="ko-KR" altLang="en-US" sz="1700" b="1" dirty="0">
+              <a:rPr lang="ko-KR" altLang="en-US" sz="1600" b="1" dirty="0">
                 <a:solidFill>
                   <a:srgbClr val="FFFFFF"/>
                 </a:solidFill>
@@ -27431,10 +27433,10 @@
                 <a:ea typeface="Malgun Gothic" pitchFamily="34" charset="-122"/>
                 <a:cs typeface="Malgun Gothic" pitchFamily="34" charset="-120"/>
               </a:rPr>
-              <a:t>스물 살</a:t>
-            </a:r>
-            <a:r>
-              <a:rPr lang="en-US" sz="1700" b="1" dirty="0">
+              <a:t>스물 살</a:t>
+            </a:r>
+            <a:r>
+              <a:rPr lang="en-US" sz="1600" b="1" dirty="0">
                 <a:solidFill>
                   <a:srgbClr val="FFFFFF"/>
                 </a:solidFill>
@@ -27442,7 +27444,7 @@
               <a:t>* → </a:t>
             </a:r>
             <a:r>
-              <a:rPr lang="ko-KR" altLang="en-US" sz="1700" b="1" dirty="0">
+              <a:rPr lang="ko-KR" altLang="en-US" sz="1600" b="1" dirty="0">
                 <a:solidFill>
                   <a:srgbClr val="FFFFFF"/>
                 </a:solidFill>
@@ -27450,10 +27452,10 @@
                 <a:ea typeface="Malgun Gothic" pitchFamily="34" charset="-122"/>
                 <a:cs typeface="Malgun Gothic" pitchFamily="34" charset="-120"/>
               </a:rPr>
-              <a:t>스무 살 </a:t>
-            </a:r>
-            <a:r>
-              <a:rPr lang="en-US" sz="1700" b="1" dirty="0">
+              <a:t>스무 살 </a:t>
+            </a:r>
+            <a:r>
+              <a:rPr lang="en-US" sz="1600" b="1" dirty="0">
                 <a:solidFill>
                   <a:srgbClr val="FFFFFF"/>
                 </a:solidFill>
@@ -27461,7 +27463,7 @@
               <a:t>· </a:t>
             </a:r>
             <a:r>
-              <a:rPr lang="ko-KR" altLang="en-US" sz="1700" b="1" dirty="0">
+              <a:rPr lang="ko-KR" altLang="en-US" sz="1600" b="1" dirty="0">
                 <a:solidFill>
                   <a:srgbClr val="FFFFFF"/>
                 </a:solidFill>
@@ -27472,7 +27474,7 @@
               <a:t>육월</a:t>
             </a:r>
             <a:r>
-              <a:rPr lang="en-US" sz="1700" b="1" dirty="0">
+              <a:rPr lang="en-US" sz="1600" b="1" dirty="0">
                 <a:solidFill>
                   <a:srgbClr val="FFFFFF"/>
                 </a:solidFill>
@@ -27480,7 +27482,7 @@
               <a:t>* → </a:t>
             </a:r>
             <a:r>
-              <a:rPr lang="ko-KR" altLang="en-US" sz="1700" b="1" dirty="0">
+              <a:rPr lang="ko-KR" altLang="en-US" sz="1600" b="1" dirty="0">
                 <a:solidFill>
                   <a:srgbClr val="FFFFFF"/>
                 </a:solidFill>
@@ -27491,7 +27493,7 @@
               <a:t>유월 </a:t>
             </a:r>
             <a:r>
-              <a:rPr lang="en-US" sz="1700" b="1" dirty="0">
+              <a:rPr lang="en-US" sz="1600" b="1" dirty="0">
                 <a:solidFill>
                   <a:srgbClr val="FFFFFF"/>
                 </a:solidFill>
@@ -27499,7 +27501,7 @@
               <a:t>· </a:t>
             </a:r>
             <a:r>
-              <a:rPr lang="ko-KR" altLang="en-US" sz="1700" b="1" dirty="0">
+              <a:rPr lang="ko-KR" altLang="en-US" sz="1600" b="1" dirty="0">
                 <a:solidFill>
                   <a:srgbClr val="FFFFFF"/>
                 </a:solidFill>
@@ -27510,7 +27512,7 @@
               <a:t>몇일</a:t>
             </a:r>
             <a:r>
-              <a:rPr lang="en-US" sz="1700" b="1" dirty="0">
+              <a:rPr lang="en-US" sz="1600" b="1" dirty="0">
                 <a:solidFill>
                   <a:srgbClr val="FFFFFF"/>
                 </a:solidFill>
@@ -27518,7 +27520,7 @@
               <a:t>* → </a:t>
             </a:r>
             <a:r>
-              <a:rPr lang="ko-KR" altLang="en-US" sz="1700" b="1" dirty="0">
+              <a:rPr lang="ko-KR" altLang="en-US" sz="1600" b="1" dirty="0">
                 <a:solidFill>
                   <a:srgbClr val="FFFFFF"/>
                 </a:solidFill>
@@ -27528,7 +27530,7 @@
               </a:rPr>
               <a:t>며칠</a:t>
             </a:r>
-            <a:endParaRPr lang="en-US" sz="1700" dirty="0"/>
+            <a:endParaRPr lang="en-US" sz="1600" dirty="0"/>
           </a:p>
         </p:txBody>
       </p:sp>
@@ -28192,7 +28194,7 @@
               <a:buChar char="•"/>
             </a:pPr>
             <a:r>
-              <a:rPr lang="ko-KR" altLang="en-US" sz="2400" dirty="0">
+              <a:rPr lang="ko-KR" altLang="en-US" sz="2800" dirty="0">
                 <a:solidFill>
                   <a:srgbClr val="14142B"/>
                 </a:solidFill>
@@ -28203,14 +28205,14 @@
               <a:t>씻고 아침을 먹어요</a:t>
             </a:r>
             <a:r>
-              <a:rPr lang="en-US" sz="2400" dirty="0">
+              <a:rPr lang="en-US" sz="2800" dirty="0">
                 <a:solidFill>
                   <a:srgbClr val="14142B"/>
                 </a:solidFill>
               </a:rPr>
               <a:t>. — Me lavo y desayuno.</a:t>
             </a:r>
-            <a:endParaRPr lang="en-US" sz="2400" dirty="0"/>
+            <a:endParaRPr lang="en-US" sz="2800" dirty="0"/>
           </a:p>
           <a:p>
             <a:pPr marL="228600" indent="-228600" eaLnBrk="1">
@@ -28221,7 +28223,7 @@
               <a:buChar char="•"/>
             </a:pPr>
             <a:r>
-              <a:rPr lang="ko-KR" altLang="en-US" sz="2400" dirty="0">
+              <a:rPr lang="ko-KR" altLang="en-US" sz="2800" dirty="0">
                 <a:solidFill>
                   <a:srgbClr val="14142B"/>
                 </a:solidFill>
@@ -28232,14 +28234,14 @@
               <a:t>회사에서 일해요</a:t>
             </a:r>
             <a:r>
-              <a:rPr lang="en-US" sz="2400" dirty="0">
+              <a:rPr lang="en-US" sz="2800" dirty="0">
                 <a:solidFill>
                   <a:srgbClr val="14142B"/>
                 </a:solidFill>
               </a:rPr>
               <a:t>. — Trabajo en la oficina.</a:t>
             </a:r>
-            <a:endParaRPr lang="en-US" sz="2400" dirty="0"/>
+            <a:endParaRPr lang="en-US" sz="2800" dirty="0"/>
           </a:p>
           <a:p>
             <a:pPr marL="228600" indent="-228600" eaLnBrk="1">
@@ -28250,7 +28252,7 @@
               <a:buChar char="•"/>
             </a:pPr>
             <a:r>
-              <a:rPr lang="ko-KR" altLang="en-US" sz="2400" dirty="0">
+              <a:rPr lang="ko-KR" altLang="en-US" sz="2800" dirty="0">
                 <a:solidFill>
                   <a:srgbClr val="14142B"/>
                 </a:solidFill>
@@ -28261,14 +28263,14 @@
               <a:t>요즘 너무 바빠요</a:t>
             </a:r>
             <a:r>
-              <a:rPr lang="en-US" sz="2400" dirty="0">
+              <a:rPr lang="en-US" sz="2800" dirty="0">
                 <a:solidFill>
                   <a:srgbClr val="14142B"/>
                 </a:solidFill>
               </a:rPr>
               <a:t>. — Estos días ando súper ocupado/a.</a:t>
             </a:r>
-            <a:endParaRPr lang="en-US" sz="2400" dirty="0"/>
+            <a:endParaRPr lang="en-US" sz="2800" dirty="0"/>
           </a:p>
         </p:txBody>
       </p:sp>
@@ -29145,8 +29147,8 @@
         </p:nvSpPr>
         <p:spPr>
           <a:xfrm>
-            <a:off x="1463040" y="3657600"/>
-            <a:ext cx="9262872" cy="822960"/>
+            <a:off x="1783080" y="3657600"/>
+            <a:ext cx="8439912" cy="822960"/>
           </a:xfrm>
           <a:prstGeom prst="rect">
             <a:avLst/>
@@ -29407,7 +29409,7 @@
         <p:spPr>
           <a:xfrm>
             <a:off x="548640" y="1325880"/>
-            <a:ext cx="11064240" cy="457200"/>
+            <a:ext cx="11091672" cy="457200"/>
           </a:xfrm>
           <a:prstGeom prst="rect">
             <a:avLst/>
@@ -29573,8 +29575,8 @@
         </p:blipFill>
         <p:spPr>
           <a:xfrm>
-            <a:off x="1893799" y="1984248"/>
-            <a:ext cx="854507" cy="854507"/>
+            <a:off x="1832762" y="1984248"/>
+            <a:ext cx="976579" cy="976579"/>
           </a:xfrm>
           <a:prstGeom prst="rect">
             <a:avLst/>
@@ -29589,8 +29591,8 @@
         </p:nvSpPr>
         <p:spPr>
           <a:xfrm>
-            <a:off x="548640" y="2857043"/>
-            <a:ext cx="3544824" cy="447599"/>
+            <a:off x="548640" y="2979115"/>
+            <a:ext cx="3544824" cy="406908"/>
           </a:xfrm>
           <a:prstGeom prst="rect">
             <a:avLst/>
@@ -29608,7 +29610,7 @@
               <a:buNone/>
             </a:pPr>
             <a:r>
-              <a:rPr lang="ko-KR" altLang="en-US" sz="2800" b="1" dirty="0">
+              <a:rPr lang="ko-KR" altLang="en-US" sz="2500" b="1" dirty="0">
                 <a:solidFill>
                   <a:srgbClr val="4236F6"/>
                 </a:solidFill>
@@ -29618,7 +29620,7 @@
               </a:rPr>
               <a:t>카페</a:t>
             </a:r>
-            <a:endParaRPr lang="en-US" sz="2800" dirty="0"/>
+            <a:endParaRPr lang="en-US" sz="2500" dirty="0"/>
           </a:p>
         </p:txBody>
       </p:sp>
@@ -29630,8 +29632,8 @@
         </p:nvSpPr>
         <p:spPr>
           <a:xfrm>
-            <a:off x="621792" y="3304642"/>
-            <a:ext cx="3398520" cy="274320"/>
+            <a:off x="621792" y="3386023"/>
+            <a:ext cx="3398520" cy="449885"/>
           </a:xfrm>
           <a:prstGeom prst="rect">
             <a:avLst/>
@@ -29685,8 +29687,8 @@
         </p:blipFill>
         <p:spPr>
           <a:xfrm>
-            <a:off x="3654552" y="3488436"/>
-            <a:ext cx="329184" cy="329184"/>
+            <a:off x="3691128" y="1947672"/>
+            <a:ext cx="310896" cy="310896"/>
           </a:xfrm>
           <a:prstGeom prst="rect">
             <a:avLst/>
@@ -29743,8 +29745,8 @@
         </p:blipFill>
         <p:spPr>
           <a:xfrm>
-            <a:off x="5667223" y="1984248"/>
-            <a:ext cx="854507" cy="854507"/>
+            <a:off x="5606186" y="1984248"/>
+            <a:ext cx="976579" cy="976579"/>
           </a:xfrm>
           <a:prstGeom prst="rect">
             <a:avLst/>
@@ -29759,8 +29761,8 @@
         </p:nvSpPr>
         <p:spPr>
           <a:xfrm>
-            <a:off x="4322064" y="2857043"/>
-            <a:ext cx="3544824" cy="447599"/>
+            <a:off x="4322064" y="2979115"/>
+            <a:ext cx="3544824" cy="406908"/>
           </a:xfrm>
           <a:prstGeom prst="rect">
             <a:avLst/>
@@ -29778,7 +29780,7 @@
               <a:buNone/>
             </a:pPr>
             <a:r>
-              <a:rPr lang="ko-KR" altLang="en-US" sz="2800" b="1" dirty="0">
+              <a:rPr lang="ko-KR" altLang="en-US" sz="2500" b="1" dirty="0">
                 <a:solidFill>
                   <a:srgbClr val="4236F6"/>
                 </a:solidFill>
@@ -29788,7 +29790,7 @@
               </a:rPr>
               <a:t>집</a:t>
             </a:r>
-            <a:endParaRPr lang="en-US" sz="2800" dirty="0"/>
+            <a:endParaRPr lang="en-US" sz="2500" dirty="0"/>
           </a:p>
         </p:txBody>
       </p:sp>
@@ -29800,8 +29802,8 @@
         </p:nvSpPr>
         <p:spPr>
           <a:xfrm>
-            <a:off x="4395216" y="3304642"/>
-            <a:ext cx="3398520" cy="274320"/>
+            <a:off x="4395216" y="3386023"/>
+            <a:ext cx="3398520" cy="449885"/>
           </a:xfrm>
           <a:prstGeom prst="rect">
             <a:avLst/>
@@ -29855,8 +29857,8 @@
         </p:blipFill>
         <p:spPr>
           <a:xfrm>
-            <a:off x="7427976" y="3488436"/>
-            <a:ext cx="329184" cy="329184"/>
+            <a:off x="7464552" y="1947672"/>
+            <a:ext cx="310896" cy="310896"/>
           </a:xfrm>
           <a:prstGeom prst="rect">
             <a:avLst/>
@@ -29913,8 +29915,8 @@
         </p:blipFill>
         <p:spPr>
           <a:xfrm>
-            <a:off x="9440647" y="1984248"/>
-            <a:ext cx="854507" cy="854507"/>
+            <a:off x="9379610" y="1984248"/>
+            <a:ext cx="976579" cy="976579"/>
           </a:xfrm>
           <a:prstGeom prst="rect">
             <a:avLst/>
@@ -29929,8 +29931,8 @@
         </p:nvSpPr>
         <p:spPr>
           <a:xfrm>
-            <a:off x="8095488" y="2857043"/>
-            <a:ext cx="3544824" cy="447599"/>
+            <a:off x="8095488" y="2979115"/>
+            <a:ext cx="3544824" cy="406908"/>
           </a:xfrm>
           <a:prstGeom prst="rect">
             <a:avLst/>
@@ -29948,7 +29950,7 @@
               <a:buNone/>
             </a:pPr>
             <a:r>
-              <a:rPr lang="ko-KR" altLang="en-US" sz="2800" b="1" dirty="0">
+              <a:rPr lang="ko-KR" altLang="en-US" sz="2500" b="1" dirty="0">
                 <a:solidFill>
                   <a:srgbClr val="4236F6"/>
                 </a:solidFill>
@@ -29958,7 +29960,7 @@
               </a:rPr>
               <a:t>회사</a:t>
             </a:r>
-            <a:endParaRPr lang="en-US" sz="2800" dirty="0"/>
+            <a:endParaRPr lang="en-US" sz="2500" dirty="0"/>
           </a:p>
         </p:txBody>
       </p:sp>
@@ -29970,8 +29972,8 @@
         </p:nvSpPr>
         <p:spPr>
           <a:xfrm>
-            <a:off x="8168640" y="3304642"/>
-            <a:ext cx="3398520" cy="274320"/>
+            <a:off x="8168640" y="3386023"/>
+            <a:ext cx="3398520" cy="449885"/>
           </a:xfrm>
           <a:prstGeom prst="rect">
             <a:avLst/>
@@ -30025,8 +30027,8 @@
         </p:blipFill>
         <p:spPr>
           <a:xfrm>
-            <a:off x="11201400" y="3488436"/>
-            <a:ext cx="329184" cy="329184"/>
+            <a:off x="11237976" y="1947672"/>
+            <a:ext cx="310896" cy="310896"/>
           </a:xfrm>
           <a:prstGeom prst="rect">
             <a:avLst/>
@@ -30083,8 +30085,8 @@
         </p:blipFill>
         <p:spPr>
           <a:xfrm>
-            <a:off x="1893799" y="4247388"/>
-            <a:ext cx="854507" cy="854507"/>
+            <a:off x="1832762" y="4247388"/>
+            <a:ext cx="976579" cy="976579"/>
           </a:xfrm>
           <a:prstGeom prst="rect">
             <a:avLst/>
@@ -30099,8 +30101,8 @@
         </p:nvSpPr>
         <p:spPr>
           <a:xfrm>
-            <a:off x="548640" y="5120183"/>
-            <a:ext cx="3544824" cy="447599"/>
+            <a:off x="548640" y="5242255"/>
+            <a:ext cx="3544824" cy="406908"/>
           </a:xfrm>
           <a:prstGeom prst="rect">
             <a:avLst/>
@@ -30118,7 +30120,7 @@
               <a:buNone/>
             </a:pPr>
             <a:r>
-              <a:rPr lang="ko-KR" altLang="en-US" sz="2800" b="1" dirty="0">
+              <a:rPr lang="ko-KR" altLang="en-US" sz="2500" b="1" dirty="0">
                 <a:solidFill>
                   <a:srgbClr val="4236F6"/>
                 </a:solidFill>
@@ -30128,7 +30130,7 @@
               </a:rPr>
               <a:t>학교</a:t>
             </a:r>
-            <a:endParaRPr lang="en-US" sz="2800" dirty="0"/>
+            <a:endParaRPr lang="en-US" sz="2500" dirty="0"/>
           </a:p>
         </p:txBody>
       </p:sp>
@@ -30140,8 +30142,8 @@
         </p:nvSpPr>
         <p:spPr>
           <a:xfrm>
-            <a:off x="621792" y="5567782"/>
-            <a:ext cx="3398520" cy="274320"/>
+            <a:off x="621792" y="5649163"/>
+            <a:ext cx="3398520" cy="449885"/>
           </a:xfrm>
           <a:prstGeom prst="rect">
             <a:avLst/>
@@ -30195,8 +30197,8 @@
         </p:blipFill>
         <p:spPr>
           <a:xfrm>
-            <a:off x="3654552" y="5751576"/>
-            <a:ext cx="329184" cy="329184"/>
+            <a:off x="3691128" y="4210812"/>
+            <a:ext cx="310896" cy="310896"/>
           </a:xfrm>
           <a:prstGeom prst="rect">
             <a:avLst/>
@@ -30253,8 +30255,8 @@
         </p:blipFill>
         <p:spPr>
           <a:xfrm>
-            <a:off x="5667223" y="4247388"/>
-            <a:ext cx="854507" cy="854507"/>
+            <a:off x="5606186" y="4247388"/>
+            <a:ext cx="976579" cy="976579"/>
           </a:xfrm>
           <a:prstGeom prst="rect">
             <a:avLst/>
@@ -30269,8 +30271,8 @@
         </p:nvSpPr>
         <p:spPr>
           <a:xfrm>
-            <a:off x="4322064" y="5120183"/>
-            <a:ext cx="3544824" cy="447599"/>
+            <a:off x="4322064" y="5242255"/>
+            <a:ext cx="3544824" cy="406908"/>
           </a:xfrm>
           <a:prstGeom prst="rect">
             <a:avLst/>
@@ -30288,7 +30290,7 @@
               <a:buNone/>
             </a:pPr>
             <a:r>
-              <a:rPr lang="ko-KR" altLang="en-US" sz="2800" b="1" dirty="0">
+              <a:rPr lang="ko-KR" altLang="en-US" sz="2500" b="1" dirty="0">
                 <a:solidFill>
                   <a:srgbClr val="4236F6"/>
                 </a:solidFill>
@@ -30298,7 +30300,7 @@
               </a:rPr>
               <a:t>공원</a:t>
             </a:r>
-            <a:endParaRPr lang="en-US" sz="2800" dirty="0"/>
+            <a:endParaRPr lang="en-US" sz="2500" dirty="0"/>
           </a:p>
         </p:txBody>
       </p:sp>
@@ -30310,8 +30312,8 @@
         </p:nvSpPr>
         <p:spPr>
           <a:xfrm>
-            <a:off x="4395216" y="5567782"/>
-            <a:ext cx="3398520" cy="274320"/>
+            <a:off x="4395216" y="5649163"/>
+            <a:ext cx="3398520" cy="449885"/>
           </a:xfrm>
           <a:prstGeom prst="rect">
             <a:avLst/>
@@ -30365,8 +30367,8 @@
         </p:blipFill>
         <p:spPr>
           <a:xfrm>
-            <a:off x="7427976" y="5751576"/>
-            <a:ext cx="329184" cy="329184"/>
+            <a:off x="7464552" y="4210812"/>
+            <a:ext cx="310896" cy="310896"/>
           </a:xfrm>
           <a:prstGeom prst="rect">
             <a:avLst/>
@@ -30423,8 +30425,8 @@
         </p:blipFill>
         <p:spPr>
           <a:xfrm>
-            <a:off x="9440647" y="4247388"/>
-            <a:ext cx="854507" cy="854507"/>
+            <a:off x="9379610" y="4247388"/>
+            <a:ext cx="976579" cy="976579"/>
           </a:xfrm>
           <a:prstGeom prst="rect">
             <a:avLst/>
@@ -30439,8 +30441,8 @@
         </p:nvSpPr>
         <p:spPr>
           <a:xfrm>
-            <a:off x="8095488" y="5120183"/>
-            <a:ext cx="3544824" cy="447599"/>
+            <a:off x="8095488" y="5242255"/>
+            <a:ext cx="3544824" cy="406908"/>
           </a:xfrm>
           <a:prstGeom prst="rect">
             <a:avLst/>
@@ -30458,7 +30460,7 @@
               <a:buNone/>
             </a:pPr>
             <a:r>
-              <a:rPr lang="ko-KR" altLang="en-US" sz="2800" b="1" dirty="0">
+              <a:rPr lang="ko-KR" altLang="en-US" sz="2500" b="1" dirty="0">
                 <a:solidFill>
                   <a:srgbClr val="4236F6"/>
                 </a:solidFill>
@@ -30468,7 +30470,7 @@
               </a:rPr>
               <a:t>식당</a:t>
             </a:r>
-            <a:endParaRPr lang="en-US" sz="2800" dirty="0"/>
+            <a:endParaRPr lang="en-US" sz="2500" dirty="0"/>
           </a:p>
         </p:txBody>
       </p:sp>
@@ -30480,8 +30482,8 @@
         </p:nvSpPr>
         <p:spPr>
           <a:xfrm>
-            <a:off x="8168640" y="5567782"/>
-            <a:ext cx="3398520" cy="274320"/>
+            <a:off x="8168640" y="5649163"/>
+            <a:ext cx="3398520" cy="449885"/>
           </a:xfrm>
           <a:prstGeom prst="rect">
             <a:avLst/>
@@ -30535,8 +30537,8 @@
         </p:blipFill>
         <p:spPr>
           <a:xfrm>
-            <a:off x="11201400" y="5751576"/>
-            <a:ext cx="329184" cy="329184"/>
+            <a:off x="11237976" y="4210812"/>
+            <a:ext cx="310896" cy="310896"/>
           </a:xfrm>
           <a:prstGeom prst="rect">
             <a:avLst/>
@@ -30673,7 +30675,7 @@
           <p:nvPr>
             <p:extLst>
               <p:ext uri="{D42A27DB-BD31-4B8C-83A1-F6EECF244321}">
-                <p14:modId xmlns:p14="http://schemas.microsoft.com/office/powerpoint/2010/main" val="2396017304"/>
+                <p14:modId xmlns:p14="http://schemas.microsoft.com/office/powerpoint/2010/main" val="4083521409"/>
               </p:ext>
             </p:extLst>
           </p:nvPr>
@@ -30849,7 +30851,7 @@
                           <a:ea typeface="Malgun Gothic" pitchFamily="34" charset="-122"/>
                           <a:cs typeface="Malgun Gothic" pitchFamily="34" charset="-120"/>
                         </a:rPr>
-                        <a:t>보통 일곱 시쯤 일어나요</a:t>
+                        <a:t>보통 일곱 시쯤 일어나요</a:t>
                       </a:r>
                       <a:r>
                         <a:rPr lang="en-US" sz="1600" dirty="0">
@@ -31008,7 +31010,7 @@
                           <a:ea typeface="Malgun Gothic" pitchFamily="34" charset="-122"/>
                           <a:cs typeface="Malgun Gothic" pitchFamily="34" charset="-120"/>
                         </a:rPr>
-                        <a:t>아홉 시에 출근해요</a:t>
+                        <a:t>아홉 시에 출근해요</a:t>
                       </a:r>
                       <a:r>
                         <a:rPr lang="en-US" sz="1600" dirty="0">
@@ -31760,7 +31762,7 @@
         <p:spPr>
           <a:xfrm>
             <a:off x="548640" y="1325880"/>
-            <a:ext cx="6949440" cy="548640"/>
+            <a:ext cx="5669280" cy="548640"/>
           </a:xfrm>
           <a:prstGeom prst="rect">
             <a:avLst/>
@@ -31798,7 +31800,7 @@
         <p:spPr>
           <a:xfrm>
             <a:off x="548640" y="1965960"/>
-            <a:ext cx="6949440" cy="4206240"/>
+            <a:ext cx="5669280" cy="4206240"/>
           </a:xfrm>
           <a:prstGeom prst="rect">
             <a:avLst/>
@@ -31929,12 +31931,12 @@
         </p:nvSpPr>
         <p:spPr>
           <a:xfrm>
-            <a:off x="8001000" y="1417320"/>
-            <a:ext cx="3611880" cy="4480560"/>
+            <a:off x="6446520" y="1371600"/>
+            <a:ext cx="5193792" cy="4800600"/>
           </a:xfrm>
           <a:prstGeom prst="roundRect">
             <a:avLst>
-              <a:gd name="adj" fmla="val 6329"/>
+              <a:gd name="adj" fmla="val 4762"/>
             </a:avLst>
           </a:prstGeom>
           <a:solidFill>
@@ -31948,58 +31950,30 @@
           </a:ln>
         </p:spPr>
       </p:sp>
-      <p:sp>
-        <p:nvSpPr>
-          <p:cNvPr id="6" name="imagen_pendiente"/>
-          <p:cNvSpPr txBox="1"/>
-          <p:nvPr/>
-        </p:nvSpPr>
-        <p:spPr>
-          <a:xfrm>
-            <a:off x="8183880" y="1600200"/>
-            <a:ext cx="3246120" cy="4114800"/>
+      <p:pic>
+        <p:nvPicPr>
+          <p:cNvPr id="6" name="imagen" descr="C:\Users\Chingu\AppData\Local\Temp\claude\C--Users-Chingu-Desktop-ACADEMIASEULWEB\d4111e1b-5523-44ea-97b2-b1a1d9545b9e\scratchpad\decks\cache\img_4fb9ee438f826a11.png"/>
+          <p:cNvPicPr>
+            <a:picLocks noChangeAspect="1"/>
+          </p:cNvPicPr>
+          <p:nvPr/>
+        </p:nvPicPr>
+        <p:blipFill>
+          <a:blip r:embed="rId3"/>
+          <a:stretch>
+            <a:fillRect/>
+          </a:stretch>
+        </p:blipFill>
+        <p:spPr>
+          <a:xfrm>
+            <a:off x="7040833" y="1463040"/>
+            <a:ext cx="4005165" cy="4617720"/>
           </a:xfrm>
           <a:prstGeom prst="rect">
             <a:avLst/>
           </a:prstGeom>
-          <a:noFill/>
-          <a:ln/>
-        </p:spPr>
-        <p:txBody>
-          <a:bodyPr wrap="square" lIns="76200" tIns="76200" rIns="76200" bIns="76200" rtlCol="0" anchor="ctr">
-            <a:normAutofit/>
-          </a:bodyPr>
-          <a:lstStyle/>
-          <a:p>
-            <a:pPr marL="0" indent="0" algn="ctr" eaLnBrk="1">
-              <a:buNone/>
-            </a:pPr>
-            <a:r>
-              <a:rPr lang="en-US" sz="1600" b="1" dirty="0">
-                <a:solidFill>
-                  <a:srgbClr val="4236F6"/>
-                </a:solidFill>
-              </a:rPr>
-              <a:t>Imagen pendiente</a:t>
-            </a:r>
-            <a:endParaRPr lang="en-US" sz="1600" dirty="0"/>
-          </a:p>
-          <a:p>
-            <a:pPr marL="0" indent="0" algn="ctr" eaLnBrk="1">
-              <a:buNone/>
-            </a:pPr>
-            <a:r>
-              <a:rPr lang="en-US" sz="1300" dirty="0">
-                <a:solidFill>
-                  <a:srgbClr val="5C5F6B"/>
-                </a:solidFill>
-              </a:rPr>
-              <a:t>6 fotos del día de Jay (las elige Jay, propias o con licencia libre), numeradas y con su hora, sin texto: despertador 7:00 · lavarse + desayuno 7:30 · computador 9:00 · ejercicio en el parque 18:00 · audífonos en casa 20:00 · pantalla de la clase 21:00</a:t>
-            </a:r>
-            <a:endParaRPr lang="en-US" sz="1600" dirty="0"/>
-          </a:p>
-        </p:txBody>
-      </p:sp>
+        </p:spPr>
+      </p:pic>
       <p:sp>
         <p:nvSpPr>
           <p:cNvPr id="25" name="Slide Number Placeholder 0"/>
@@ -32130,7 +32104,7 @@
         <p:spPr>
           <a:xfrm>
             <a:off x="548640" y="1325880"/>
-            <a:ext cx="11064240" cy="457200"/>
+            <a:ext cx="11091672" cy="457200"/>
           </a:xfrm>
           <a:prstGeom prst="rect">
             <a:avLst/>
@@ -32223,16 +32197,40 @@
           </a:effectLst>
         </p:spPr>
       </p:sp>
-      <p:sp>
-        <p:nvSpPr>
-          <p:cNvPr id="5" name="Text 3"/>
+      <p:pic>
+        <p:nvPicPr>
+          <p:cNvPr id="5" name="dibujo_0" descr="C:\Users\Chingu\AppData\Local\Temp\claude\C--Users-Chingu-Desktop-ACADEMIASEULWEB\d4111e1b-5523-44ea-97b2-b1a1d9545b9e\scratchpad\decks\cache\img_d4399f7dc373d1ed.png"/>
+          <p:cNvPicPr>
+            <a:picLocks noChangeAspect="1"/>
+          </p:cNvPicPr>
+          <p:nvPr/>
+        </p:nvPicPr>
+        <p:blipFill>
+          <a:blip r:embed="rId5"/>
+          <a:stretch>
+            <a:fillRect/>
+          </a:stretch>
+        </p:blipFill>
+        <p:spPr>
+          <a:xfrm>
+            <a:off x="1832762" y="1984248"/>
+            <a:ext cx="976579" cy="976579"/>
+          </a:xfrm>
+          <a:prstGeom prst="rect">
+            <a:avLst/>
+          </a:prstGeom>
+        </p:spPr>
+      </p:pic>
+      <p:sp>
+        <p:nvSpPr>
+          <p:cNvPr id="6" name="Text 3"/>
           <p:cNvSpPr txBox="1"/>
           <p:nvPr/>
         </p:nvSpPr>
         <p:spPr>
           <a:xfrm>
-            <a:off x="548640" y="2228393"/>
-            <a:ext cx="3544824" cy="691744"/>
+            <a:off x="548640" y="2979115"/>
+            <a:ext cx="3544824" cy="406908"/>
           </a:xfrm>
           <a:prstGeom prst="rect">
             <a:avLst/>
@@ -32250,7 +32248,7 @@
               <a:buNone/>
             </a:pPr>
             <a:r>
-              <a:rPr lang="ko-KR" altLang="en-US" sz="2100" b="1" dirty="0">
+              <a:rPr lang="ko-KR" altLang="en-US" sz="1600" b="1" dirty="0">
                 <a:solidFill>
                   <a:srgbClr val="4236F6"/>
                 </a:solidFill>
@@ -32258,47 +32256,30 @@
                 <a:ea typeface="Malgun Gothic" pitchFamily="34" charset="-122"/>
                 <a:cs typeface="Malgun Gothic" pitchFamily="34" charset="-120"/>
               </a:rPr>
-              <a:t>보통 일곱 시쯤</a:t>
-            </a:r>
-            <a:endParaRPr lang="en-US" sz="2100" dirty="0"/>
-          </a:p>
-          <a:p>
-            <a:pPr marL="0" indent="0" algn="ctr" eaLnBrk="1">
-              <a:buNone/>
-            </a:pPr>
-            <a:r>
-              <a:rPr lang="ko-KR" altLang="en-US" sz="2100" b="1" dirty="0">
+              <a:t>보통 일곱 시쯤 일어나요</a:t>
+            </a:r>
+            <a:r>
+              <a:rPr lang="en-US" sz="1600" b="1" dirty="0">
                 <a:solidFill>
                   <a:srgbClr val="4236F6"/>
                 </a:solidFill>
-                <a:latin typeface="Malgun Gothic" pitchFamily="34" charset="0"/>
-                <a:ea typeface="Malgun Gothic" pitchFamily="34" charset="-122"/>
-                <a:cs typeface="Malgun Gothic" pitchFamily="34" charset="-120"/>
-              </a:rPr>
-              <a:t>일어나요</a:t>
-            </a:r>
-            <a:r>
-              <a:rPr lang="en-US" sz="2100" b="1" dirty="0">
-                <a:solidFill>
-                  <a:srgbClr val="4236F6"/>
-                </a:solidFill>
               </a:rPr>
               <a:t>.</a:t>
             </a:r>
-            <a:endParaRPr lang="en-US" sz="2100" dirty="0"/>
-          </a:p>
-        </p:txBody>
-      </p:sp>
-      <p:sp>
-        <p:nvSpPr>
-          <p:cNvPr id="6" name="Text 4"/>
+            <a:endParaRPr lang="en-US" sz="1600" dirty="0"/>
+          </a:p>
+        </p:txBody>
+      </p:sp>
+      <p:sp>
+        <p:nvSpPr>
+          <p:cNvPr id="7" name="Text 4"/>
           <p:cNvSpPr txBox="1"/>
           <p:nvPr/>
         </p:nvSpPr>
         <p:spPr>
           <a:xfrm>
-            <a:off x="621792" y="2920136"/>
-            <a:ext cx="3398520" cy="577444"/>
+            <a:off x="621792" y="3386023"/>
+            <a:ext cx="3398520" cy="449885"/>
           </a:xfrm>
           <a:prstGeom prst="rect">
             <a:avLst/>
@@ -32316,20 +32297,20 @@
               <a:buNone/>
             </a:pPr>
             <a:r>
-              <a:rPr lang="en-US" sz="1600" dirty="0">
+              <a:rPr lang="en-US" sz="1400" dirty="0">
                 <a:solidFill>
                   <a:srgbClr val="5C5F6B"/>
                 </a:solidFill>
               </a:rPr>
               <a:t>7:00 · Normalmente me levanto como a las siete.</a:t>
             </a:r>
-            <a:endParaRPr lang="en-US" sz="1600" dirty="0"/>
-          </a:p>
-        </p:txBody>
-      </p:sp>
-      <p:sp>
-        <p:nvSpPr>
-          <p:cNvPr id="7" name="card_1"/>
+            <a:endParaRPr lang="en-US" sz="1400" dirty="0"/>
+          </a:p>
+        </p:txBody>
+      </p:sp>
+      <p:sp>
+        <p:nvSpPr>
+          <p:cNvPr id="8" name="card_1"/>
           <p:cNvSpPr/>
           <p:nvPr/>
         </p:nvSpPr>
@@ -32361,16 +32342,40 @@
           </a:effectLst>
         </p:spPr>
       </p:sp>
-      <p:sp>
-        <p:nvSpPr>
-          <p:cNvPr id="8" name="Text 6"/>
+      <p:pic>
+        <p:nvPicPr>
+          <p:cNvPr id="9" name="dibujo_1" descr="C:\Users\Chingu\AppData\Local\Temp\claude\C--Users-Chingu-Desktop-ACADEMIASEULWEB\d4111e1b-5523-44ea-97b2-b1a1d9545b9e\scratchpad\decks\cache\img_3dc2e8a43f13aa0c.png"/>
+          <p:cNvPicPr>
+            <a:picLocks noChangeAspect="1"/>
+          </p:cNvPicPr>
+          <p:nvPr/>
+        </p:nvPicPr>
+        <p:blipFill>
+          <a:blip r:embed="rId6"/>
+          <a:stretch>
+            <a:fillRect/>
+          </a:stretch>
+        </p:blipFill>
+        <p:spPr>
+          <a:xfrm>
+            <a:off x="5606186" y="1984248"/>
+            <a:ext cx="976579" cy="976579"/>
+          </a:xfrm>
+          <a:prstGeom prst="rect">
+            <a:avLst/>
+          </a:prstGeom>
+        </p:spPr>
+      </p:pic>
+      <p:sp>
+        <p:nvSpPr>
+          <p:cNvPr id="10" name="Text 6"/>
           <p:cNvSpPr txBox="1"/>
           <p:nvPr/>
         </p:nvSpPr>
         <p:spPr>
           <a:xfrm>
-            <a:off x="4322064" y="2228393"/>
-            <a:ext cx="3544824" cy="691744"/>
+            <a:off x="4322064" y="2979115"/>
+            <a:ext cx="3544824" cy="406908"/>
           </a:xfrm>
           <a:prstGeom prst="rect">
             <a:avLst/>
@@ -32388,7 +32393,7 @@
               <a:buNone/>
             </a:pPr>
             <a:r>
-              <a:rPr lang="ko-KR" altLang="en-US" sz="2500" b="1" dirty="0">
+              <a:rPr lang="ko-KR" altLang="en-US" sz="1600" b="1" dirty="0">
                 <a:solidFill>
                   <a:srgbClr val="4236F6"/>
                 </a:solidFill>
@@ -32399,27 +32404,27 @@
               <a:t>씻고 아침을 먹어요</a:t>
             </a:r>
             <a:r>
-              <a:rPr lang="en-US" sz="2500" b="1" dirty="0">
+              <a:rPr lang="en-US" sz="1600" b="1" dirty="0">
                 <a:solidFill>
                   <a:srgbClr val="4236F6"/>
                 </a:solidFill>
               </a:rPr>
               <a:t>.</a:t>
             </a:r>
-            <a:endParaRPr lang="en-US" sz="2500" dirty="0"/>
-          </a:p>
-        </p:txBody>
-      </p:sp>
-      <p:sp>
-        <p:nvSpPr>
-          <p:cNvPr id="9" name="Text 7"/>
+            <a:endParaRPr lang="en-US" sz="1600" dirty="0"/>
+          </a:p>
+        </p:txBody>
+      </p:sp>
+      <p:sp>
+        <p:nvSpPr>
+          <p:cNvPr id="11" name="Text 7"/>
           <p:cNvSpPr txBox="1"/>
           <p:nvPr/>
         </p:nvSpPr>
         <p:spPr>
           <a:xfrm>
-            <a:off x="4395216" y="2920136"/>
-            <a:ext cx="3398520" cy="577444"/>
+            <a:off x="4395216" y="3386023"/>
+            <a:ext cx="3398520" cy="449885"/>
           </a:xfrm>
           <a:prstGeom prst="rect">
             <a:avLst/>
@@ -32450,7 +32455,7 @@
       </p:sp>
       <p:pic>
         <p:nvPicPr>
-          <p:cNvPr id="10" name="Media 0">
+          <p:cNvPr id="12" name="Media 0">
             <a:hlinkClick r:id="" action="ppaction://media"/>
           </p:cNvPr>
           <p:cNvPicPr>
@@ -32466,15 +32471,15 @@
           </p:nvPr>
         </p:nvPicPr>
         <p:blipFill>
-          <a:blip r:embed="rId5"/>
+          <a:blip r:embed="rId7"/>
           <a:stretch>
             <a:fillRect/>
           </a:stretch>
         </p:blipFill>
         <p:spPr>
           <a:xfrm>
-            <a:off x="7427976" y="3488436"/>
-            <a:ext cx="329184" cy="329184"/>
+            <a:off x="7464552" y="1947672"/>
+            <a:ext cx="310896" cy="310896"/>
           </a:xfrm>
           <a:prstGeom prst="rect">
             <a:avLst/>
@@ -32483,7 +32488,7 @@
       </p:pic>
       <p:sp>
         <p:nvSpPr>
-          <p:cNvPr id="11" name="card_2"/>
+          <p:cNvPr id="13" name="card_2"/>
           <p:cNvSpPr/>
           <p:nvPr/>
         </p:nvSpPr>
@@ -32515,16 +32520,40 @@
           </a:effectLst>
         </p:spPr>
       </p:sp>
-      <p:sp>
-        <p:nvSpPr>
-          <p:cNvPr id="12" name="Text 9"/>
+      <p:pic>
+        <p:nvPicPr>
+          <p:cNvPr id="14" name="dibujo_2" descr="C:\Users\Chingu\AppData\Local\Temp\claude\C--Users-Chingu-Desktop-ACADEMIASEULWEB\d4111e1b-5523-44ea-97b2-b1a1d9545b9e\scratchpad\decks\cache\img_6f4abd6d97cedbee.png"/>
+          <p:cNvPicPr>
+            <a:picLocks noChangeAspect="1"/>
+          </p:cNvPicPr>
+          <p:nvPr/>
+        </p:nvPicPr>
+        <p:blipFill>
+          <a:blip r:embed="rId8"/>
+          <a:stretch>
+            <a:fillRect/>
+          </a:stretch>
+        </p:blipFill>
+        <p:spPr>
+          <a:xfrm>
+            <a:off x="9379610" y="1984248"/>
+            <a:ext cx="976579" cy="976579"/>
+          </a:xfrm>
+          <a:prstGeom prst="rect">
+            <a:avLst/>
+          </a:prstGeom>
+        </p:spPr>
+      </p:pic>
+      <p:sp>
+        <p:nvSpPr>
+          <p:cNvPr id="15" name="Text 9"/>
           <p:cNvSpPr txBox="1"/>
           <p:nvPr/>
         </p:nvSpPr>
         <p:spPr>
           <a:xfrm>
-            <a:off x="8095488" y="2228393"/>
-            <a:ext cx="3544824" cy="691744"/>
+            <a:off x="8095488" y="2979115"/>
+            <a:ext cx="3544824" cy="406908"/>
           </a:xfrm>
           <a:prstGeom prst="rect">
             <a:avLst/>
@@ -32542,7 +32571,7 @@
               <a:buNone/>
             </a:pPr>
             <a:r>
-              <a:rPr lang="ko-KR" altLang="en-US" sz="2100" b="1" dirty="0">
+              <a:rPr lang="ko-KR" altLang="en-US" sz="1600" b="1" dirty="0">
                 <a:solidFill>
                   <a:srgbClr val="4236F6"/>
                 </a:solidFill>
@@ -32550,24 +32579,18 @@
                 <a:ea typeface="Malgun Gothic" pitchFamily="34" charset="-122"/>
                 <a:cs typeface="Malgun Gothic" pitchFamily="34" charset="-120"/>
               </a:rPr>
-              <a:t>아홉 시에 출근해요</a:t>
-            </a:r>
-            <a:r>
-              <a:rPr lang="en-US" sz="2100" b="1" dirty="0">
+              <a:t>아홉 시에 출근해요</a:t>
+            </a:r>
+            <a:r>
+              <a:rPr lang="en-US" sz="1600" b="1" dirty="0">
                 <a:solidFill>
                   <a:srgbClr val="4236F6"/>
                 </a:solidFill>
               </a:rPr>
-              <a:t>.</a:t>
-            </a:r>
-            <a:endParaRPr lang="en-US" sz="2100" dirty="0"/>
-          </a:p>
-          <a:p>
-            <a:pPr marL="0" indent="0" algn="ctr" eaLnBrk="1">
-              <a:buNone/>
-            </a:pPr>
-            <a:r>
-              <a:rPr lang="ko-KR" altLang="en-US" sz="2100" b="1" dirty="0">
+              <a:t>. </a:t>
+            </a:r>
+            <a:r>
+              <a:rPr lang="ko-KR" altLang="en-US" sz="1600" b="1" dirty="0">
                 <a:solidFill>
                   <a:srgbClr val="4236F6"/>
                 </a:solidFill>
@@ -32578,27 +32601,27 @@
               <a:t>회사에서 일해요</a:t>
             </a:r>
             <a:r>
-              <a:rPr lang="en-US" sz="2100" b="1" dirty="0">
+              <a:rPr lang="en-US" sz="1600" b="1" dirty="0">
                 <a:solidFill>
                   <a:srgbClr val="4236F6"/>
                 </a:solidFill>
               </a:rPr>
               <a:t>.</a:t>
             </a:r>
-            <a:endParaRPr lang="en-US" sz="2100" dirty="0"/>
-          </a:p>
-        </p:txBody>
-      </p:sp>
-      <p:sp>
-        <p:nvSpPr>
-          <p:cNvPr id="13" name="Text 10"/>
+            <a:endParaRPr lang="en-US" sz="1600" dirty="0"/>
+          </a:p>
+        </p:txBody>
+      </p:sp>
+      <p:sp>
+        <p:nvSpPr>
+          <p:cNvPr id="16" name="Text 10"/>
           <p:cNvSpPr txBox="1"/>
           <p:nvPr/>
         </p:nvSpPr>
         <p:spPr>
           <a:xfrm>
-            <a:off x="8168640" y="2920136"/>
-            <a:ext cx="3398520" cy="577444"/>
+            <a:off x="8168640" y="3386023"/>
+            <a:ext cx="3398520" cy="449885"/>
           </a:xfrm>
           <a:prstGeom prst="rect">
             <a:avLst/>
@@ -32616,20 +32639,20 @@
               <a:buNone/>
             </a:pPr>
             <a:r>
-              <a:rPr lang="en-US" sz="1600" dirty="0">
+              <a:rPr lang="en-US" sz="1400" dirty="0">
                 <a:solidFill>
                   <a:srgbClr val="5C5F6B"/>
                 </a:solidFill>
               </a:rPr>
               <a:t>9:00 · Entro a trabajar a las nueve. Trabajo en la oficina.</a:t>
             </a:r>
-            <a:endParaRPr lang="en-US" sz="1600" dirty="0"/>
-          </a:p>
-        </p:txBody>
-      </p:sp>
-      <p:sp>
-        <p:nvSpPr>
-          <p:cNvPr id="14" name="card_3"/>
+            <a:endParaRPr lang="en-US" sz="1400" dirty="0"/>
+          </a:p>
+        </p:txBody>
+      </p:sp>
+      <p:sp>
+        <p:nvSpPr>
+          <p:cNvPr id="17" name="card_3"/>
           <p:cNvSpPr/>
           <p:nvPr/>
         </p:nvSpPr>
@@ -32661,16 +32684,40 @@
           </a:effectLst>
         </p:spPr>
       </p:sp>
-      <p:sp>
-        <p:nvSpPr>
-          <p:cNvPr id="15" name="Text 12"/>
+      <p:pic>
+        <p:nvPicPr>
+          <p:cNvPr id="18" name="dibujo_3" descr="C:\Users\Chingu\AppData\Local\Temp\claude\C--Users-Chingu-Desktop-ACADEMIASEULWEB\d4111e1b-5523-44ea-97b2-b1a1d9545b9e\scratchpad\decks\cache\img_5c6f22b3c69a0d0f.png"/>
+          <p:cNvPicPr>
+            <a:picLocks noChangeAspect="1"/>
+          </p:cNvPicPr>
+          <p:nvPr/>
+        </p:nvPicPr>
+        <p:blipFill>
+          <a:blip r:embed="rId9"/>
+          <a:stretch>
+            <a:fillRect/>
+          </a:stretch>
+        </p:blipFill>
+        <p:spPr>
+          <a:xfrm>
+            <a:off x="1832762" y="4247388"/>
+            <a:ext cx="976579" cy="976579"/>
+          </a:xfrm>
+          <a:prstGeom prst="rect">
+            <a:avLst/>
+          </a:prstGeom>
+        </p:spPr>
+      </p:pic>
+      <p:sp>
+        <p:nvSpPr>
+          <p:cNvPr id="19" name="Text 12"/>
           <p:cNvSpPr txBox="1"/>
           <p:nvPr/>
         </p:nvSpPr>
         <p:spPr>
           <a:xfrm>
-            <a:off x="548640" y="4491533"/>
-            <a:ext cx="3544824" cy="691744"/>
+            <a:off x="548640" y="5242255"/>
+            <a:ext cx="3544824" cy="406908"/>
           </a:xfrm>
           <a:prstGeom prst="rect">
             <a:avLst/>
@@ -32688,7 +32735,7 @@
               <a:buNone/>
             </a:pPr>
             <a:r>
-              <a:rPr lang="ko-KR" altLang="en-US" sz="1900" b="1" dirty="0">
+              <a:rPr lang="ko-KR" altLang="en-US" sz="1600" b="1" dirty="0">
                 <a:solidFill>
                   <a:srgbClr val="4236F6"/>
                 </a:solidFill>
@@ -32696,24 +32743,18 @@
                 <a:ea typeface="Malgun Gothic" pitchFamily="34" charset="-122"/>
                 <a:cs typeface="Malgun Gothic" pitchFamily="34" charset="-120"/>
               </a:rPr>
-              <a:t>여섯 시에 퇴근해요</a:t>
-            </a:r>
-            <a:r>
-              <a:rPr lang="en-US" sz="1900" b="1" dirty="0">
+              <a:t>여섯 시에 퇴근해요</a:t>
+            </a:r>
+            <a:r>
+              <a:rPr lang="en-US" sz="1600" b="1" dirty="0">
                 <a:solidFill>
                   <a:srgbClr val="4236F6"/>
                 </a:solidFill>
               </a:rPr>
-              <a:t>.</a:t>
-            </a:r>
-            <a:endParaRPr lang="en-US" sz="1900" dirty="0"/>
-          </a:p>
-          <a:p>
-            <a:pPr marL="0" indent="0" algn="ctr" eaLnBrk="1">
-              <a:buNone/>
-            </a:pPr>
-            <a:r>
-              <a:rPr lang="ko-KR" altLang="en-US" sz="1900" b="1" dirty="0">
+              <a:t>. </a:t>
+            </a:r>
+            <a:r>
+              <a:rPr lang="ko-KR" altLang="en-US" sz="1600" b="1" dirty="0">
                 <a:solidFill>
                   <a:srgbClr val="4236F6"/>
                 </a:solidFill>
@@ -32724,27 +32765,27 @@
               <a:t>그리고 공원에서 운동해요</a:t>
             </a:r>
             <a:r>
-              <a:rPr lang="en-US" sz="1900" b="1" dirty="0">
+              <a:rPr lang="en-US" sz="1600" b="1" dirty="0">
                 <a:solidFill>
                   <a:srgbClr val="4236F6"/>
                 </a:solidFill>
               </a:rPr>
               <a:t>.</a:t>
             </a:r>
-            <a:endParaRPr lang="en-US" sz="1900" dirty="0"/>
-          </a:p>
-        </p:txBody>
-      </p:sp>
-      <p:sp>
-        <p:nvSpPr>
-          <p:cNvPr id="16" name="Text 13"/>
+            <a:endParaRPr lang="en-US" sz="1600" dirty="0"/>
+          </a:p>
+        </p:txBody>
+      </p:sp>
+      <p:sp>
+        <p:nvSpPr>
+          <p:cNvPr id="20" name="Text 13"/>
           <p:cNvSpPr txBox="1"/>
           <p:nvPr/>
         </p:nvSpPr>
         <p:spPr>
           <a:xfrm>
-            <a:off x="621792" y="5183276"/>
-            <a:ext cx="3398520" cy="577444"/>
+            <a:off x="621792" y="5649163"/>
+            <a:ext cx="3398520" cy="449885"/>
           </a:xfrm>
           <a:prstGeom prst="rect">
             <a:avLst/>
@@ -32762,20 +32803,20 @@
               <a:buNone/>
             </a:pPr>
             <a:r>
-              <a:rPr lang="en-US" sz="1600" dirty="0">
+              <a:rPr lang="en-US" sz="1200" dirty="0">
                 <a:solidFill>
                   <a:srgbClr val="5C5F6B"/>
                 </a:solidFill>
               </a:rPr>
               <a:t>18:00 · Salgo del trabajo a las seis. Y hago ejercicio en el parque.</a:t>
             </a:r>
-            <a:endParaRPr lang="en-US" sz="1600" dirty="0"/>
-          </a:p>
-        </p:txBody>
-      </p:sp>
-      <p:sp>
-        <p:nvSpPr>
-          <p:cNvPr id="17" name="card_4"/>
+            <a:endParaRPr lang="en-US" sz="1200" dirty="0"/>
+          </a:p>
+        </p:txBody>
+      </p:sp>
+      <p:sp>
+        <p:nvSpPr>
+          <p:cNvPr id="21" name="card_4"/>
           <p:cNvSpPr/>
           <p:nvPr/>
         </p:nvSpPr>
@@ -32807,16 +32848,40 @@
           </a:effectLst>
         </p:spPr>
       </p:sp>
-      <p:sp>
-        <p:nvSpPr>
-          <p:cNvPr id="18" name="Text 15"/>
+      <p:pic>
+        <p:nvPicPr>
+          <p:cNvPr id="22" name="dibujo_4" descr="C:\Users\Chingu\AppData\Local\Temp\claude\C--Users-Chingu-Desktop-ACADEMIASEULWEB\d4111e1b-5523-44ea-97b2-b1a1d9545b9e\scratchpad\decks\cache\img_9997781601170ae6.png"/>
+          <p:cNvPicPr>
+            <a:picLocks noChangeAspect="1"/>
+          </p:cNvPicPr>
+          <p:nvPr/>
+        </p:nvPicPr>
+        <p:blipFill>
+          <a:blip r:embed="rId10"/>
+          <a:stretch>
+            <a:fillRect/>
+          </a:stretch>
+        </p:blipFill>
+        <p:spPr>
+          <a:xfrm>
+            <a:off x="5606186" y="4247388"/>
+            <a:ext cx="976579" cy="976579"/>
+          </a:xfrm>
+          <a:prstGeom prst="rect">
+            <a:avLst/>
+          </a:prstGeom>
+        </p:spPr>
+      </p:pic>
+      <p:sp>
+        <p:nvSpPr>
+          <p:cNvPr id="23" name="Text 15"/>
           <p:cNvSpPr txBox="1"/>
           <p:nvPr/>
         </p:nvSpPr>
         <p:spPr>
           <a:xfrm>
-            <a:off x="4322064" y="4491533"/>
-            <a:ext cx="3544824" cy="691744"/>
+            <a:off x="4322064" y="5242255"/>
+            <a:ext cx="3544824" cy="406908"/>
           </a:xfrm>
           <a:prstGeom prst="rect">
             <a:avLst/>
@@ -32834,7 +32899,7 @@
               <a:buNone/>
             </a:pPr>
             <a:r>
-              <a:rPr lang="ko-KR" altLang="en-US" sz="2100" b="1" dirty="0">
+              <a:rPr lang="ko-KR" altLang="en-US" sz="1600" b="1" dirty="0">
                 <a:solidFill>
                   <a:srgbClr val="4236F6"/>
                 </a:solidFill>
@@ -32845,21 +32910,15 @@
               <a:t>저녁에 집에서 쉬어요</a:t>
             </a:r>
             <a:r>
-              <a:rPr lang="en-US" sz="2100" b="1" dirty="0">
+              <a:rPr lang="en-US" sz="1600" b="1" dirty="0">
                 <a:solidFill>
                   <a:srgbClr val="4236F6"/>
                 </a:solidFill>
               </a:rPr>
-              <a:t>.</a:t>
-            </a:r>
-            <a:endParaRPr lang="en-US" sz="2100" dirty="0"/>
-          </a:p>
-          <a:p>
-            <a:pPr marL="0" indent="0" algn="ctr" eaLnBrk="1">
-              <a:buNone/>
-            </a:pPr>
-            <a:r>
-              <a:rPr lang="ko-KR" altLang="en-US" sz="2100" b="1" dirty="0">
+              <a:t>. </a:t>
+            </a:r>
+            <a:r>
+              <a:rPr lang="ko-KR" altLang="en-US" sz="1600" b="1" dirty="0">
                 <a:solidFill>
                   <a:srgbClr val="4236F6"/>
                 </a:solidFill>
@@ -32870,27 +32929,27 @@
               <a:t>음악을 들어요</a:t>
             </a:r>
             <a:r>
-              <a:rPr lang="en-US" sz="2100" b="1" dirty="0">
+              <a:rPr lang="en-US" sz="1600" b="1" dirty="0">
                 <a:solidFill>
                   <a:srgbClr val="4236F6"/>
                 </a:solidFill>
               </a:rPr>
               <a:t>.</a:t>
             </a:r>
-            <a:endParaRPr lang="en-US" sz="2100" dirty="0"/>
-          </a:p>
-        </p:txBody>
-      </p:sp>
-      <p:sp>
-        <p:nvSpPr>
-          <p:cNvPr id="19" name="Text 16"/>
+            <a:endParaRPr lang="en-US" sz="1600" dirty="0"/>
+          </a:p>
+        </p:txBody>
+      </p:sp>
+      <p:sp>
+        <p:nvSpPr>
+          <p:cNvPr id="24" name="Text 16"/>
           <p:cNvSpPr txBox="1"/>
           <p:nvPr/>
         </p:nvSpPr>
         <p:spPr>
           <a:xfrm>
-            <a:off x="4395216" y="5183276"/>
-            <a:ext cx="3398520" cy="577444"/>
+            <a:off x="4395216" y="5649163"/>
+            <a:ext cx="3398520" cy="449885"/>
           </a:xfrm>
           <a:prstGeom prst="rect">
             <a:avLst/>
@@ -32908,20 +32967,20 @@
               <a:buNone/>
             </a:pPr>
             <a:r>
-              <a:rPr lang="en-US" sz="1600" dirty="0">
+              <a:rPr lang="en-US" sz="1400" dirty="0">
                 <a:solidFill>
                   <a:srgbClr val="5C5F6B"/>
                 </a:solidFill>
               </a:rPr>
               <a:t>20:00 · En la tarde descanso en casa. Escucho música.</a:t>
             </a:r>
-            <a:endParaRPr lang="en-US" sz="1600" dirty="0"/>
-          </a:p>
-        </p:txBody>
-      </p:sp>
-      <p:sp>
-        <p:nvSpPr>
-          <p:cNvPr id="20" name="card_5"/>
+            <a:endParaRPr lang="en-US" sz="1400" dirty="0"/>
+          </a:p>
+        </p:txBody>
+      </p:sp>
+      <p:sp>
+        <p:nvSpPr>
+          <p:cNvPr id="25" name="card_5"/>
           <p:cNvSpPr/>
           <p:nvPr/>
         </p:nvSpPr>
@@ -32953,16 +33012,40 @@
           </a:effectLst>
         </p:spPr>
       </p:sp>
-      <p:sp>
-        <p:nvSpPr>
-          <p:cNvPr id="21" name="Text 18"/>
+      <p:pic>
+        <p:nvPicPr>
+          <p:cNvPr id="26" name="dibujo_5" descr="C:\Users\Chingu\AppData\Local\Temp\claude\C--Users-Chingu-Desktop-ACADEMIASEULWEB\d4111e1b-5523-44ea-97b2-b1a1d9545b9e\scratchpad\decks\cache\img_2c62184ef93cc367.png"/>
+          <p:cNvPicPr>
+            <a:picLocks noChangeAspect="1"/>
+          </p:cNvPicPr>
+          <p:nvPr/>
+        </p:nvPicPr>
+        <p:blipFill>
+          <a:blip r:embed="rId11"/>
+          <a:stretch>
+            <a:fillRect/>
+          </a:stretch>
+        </p:blipFill>
+        <p:spPr>
+          <a:xfrm>
+            <a:off x="9379610" y="4247388"/>
+            <a:ext cx="976579" cy="976579"/>
+          </a:xfrm>
+          <a:prstGeom prst="rect">
+            <a:avLst/>
+          </a:prstGeom>
+        </p:spPr>
+      </p:pic>
+      <p:sp>
+        <p:nvSpPr>
+          <p:cNvPr id="27" name="Text 18"/>
           <p:cNvSpPr txBox="1"/>
           <p:nvPr/>
         </p:nvSpPr>
         <p:spPr>
           <a:xfrm>
-            <a:off x="8095488" y="4491533"/>
-            <a:ext cx="3544824" cy="691744"/>
+            <a:off x="8095488" y="5242255"/>
+            <a:ext cx="3544824" cy="406908"/>
           </a:xfrm>
           <a:prstGeom prst="rect">
             <a:avLst/>
@@ -32980,7 +33063,7 @@
               <a:buNone/>
             </a:pPr>
             <a:r>
-              <a:rPr lang="ko-KR" altLang="en-US" sz="1800" b="1" dirty="0">
+              <a:rPr lang="ko-KR" altLang="en-US" sz="1600" b="1" dirty="0">
                 <a:solidFill>
                   <a:srgbClr val="4236F6"/>
                 </a:solidFill>
@@ -32991,7 +33074,7 @@
               <a:t>그리고 지금은</a:t>
             </a:r>
             <a:r>
-              <a:rPr lang="en-US" sz="1800" b="1" dirty="0">
+              <a:rPr lang="en-US" sz="1600" b="1" dirty="0">
                 <a:solidFill>
                   <a:srgbClr val="4236F6"/>
                 </a:solidFill>
@@ -32999,7 +33082,7 @@
               <a:t>… </a:t>
             </a:r>
             <a:r>
-              <a:rPr lang="ko-KR" altLang="en-US" sz="1800" b="1" dirty="0">
+              <a:rPr lang="ko-KR" altLang="en-US" sz="1600" b="1" dirty="0">
                 <a:solidFill>
                   <a:srgbClr val="4236F6"/>
                 </a:solidFill>
@@ -33010,21 +33093,15 @@
               <a:t>한국어 수업</a:t>
             </a:r>
             <a:r>
-              <a:rPr lang="en-US" sz="1800" b="1" dirty="0">
+              <a:rPr lang="en-US" sz="1600" b="1" dirty="0">
                 <a:solidFill>
                   <a:srgbClr val="4236F6"/>
                 </a:solidFill>
               </a:rPr>
-              <a:t>!</a:t>
-            </a:r>
-            <a:endParaRPr lang="en-US" sz="1800" dirty="0"/>
-          </a:p>
-          <a:p>
-            <a:pPr marL="0" indent="0" algn="ctr" eaLnBrk="1">
-              <a:buNone/>
-            </a:pPr>
-            <a:r>
-              <a:rPr lang="ko-KR" altLang="en-US" sz="1800" b="1" dirty="0">
+              <a:t>! </a:t>
+            </a:r>
+            <a:r>
+              <a:rPr lang="ko-KR" altLang="en-US" sz="1600" b="1" dirty="0">
                 <a:solidFill>
                   <a:srgbClr val="4236F6"/>
                 </a:solidFill>
@@ -33035,7 +33112,7 @@
               <a:t>요즘 너무 바빠요</a:t>
             </a:r>
             <a:r>
-              <a:rPr lang="en-US" sz="1800" b="1" dirty="0">
+              <a:rPr lang="en-US" sz="1600" b="1" dirty="0">
                 <a:solidFill>
                   <a:srgbClr val="4236F6"/>
                 </a:solidFill>
@@ -33043,7 +33120,7 @@
               <a:t>. </a:t>
             </a:r>
             <a:r>
-              <a:rPr lang="ko-KR" altLang="en-US" sz="1800" b="1" dirty="0">
+              <a:rPr lang="ko-KR" altLang="en-US" sz="1600" b="1" dirty="0">
                 <a:solidFill>
                   <a:srgbClr val="4236F6"/>
                 </a:solidFill>
@@ -33054,27 +33131,27 @@
               <a:t>하하</a:t>
             </a:r>
             <a:r>
-              <a:rPr lang="en-US" sz="1800" b="1" dirty="0">
+              <a:rPr lang="en-US" sz="1600" b="1" dirty="0">
                 <a:solidFill>
                   <a:srgbClr val="4236F6"/>
                 </a:solidFill>
               </a:rPr>
               <a:t>.</a:t>
             </a:r>
-            <a:endParaRPr lang="en-US" sz="1800" dirty="0"/>
-          </a:p>
-        </p:txBody>
-      </p:sp>
-      <p:sp>
-        <p:nvSpPr>
-          <p:cNvPr id="22" name="Text 19"/>
+            <a:endParaRPr lang="en-US" sz="1600" dirty="0"/>
+          </a:p>
+        </p:txBody>
+      </p:sp>
+      <p:sp>
+        <p:nvSpPr>
+          <p:cNvPr id="28" name="Text 19"/>
           <p:cNvSpPr txBox="1"/>
           <p:nvPr/>
         </p:nvSpPr>
         <p:spPr>
           <a:xfrm>
-            <a:off x="8168640" y="5183276"/>
-            <a:ext cx="3398520" cy="577444"/>
+            <a:off x="8168640" y="5649163"/>
+            <a:ext cx="3398520" cy="449885"/>
           </a:xfrm>
           <a:prstGeom prst="rect">
             <a:avLst/>
@@ -33092,20 +33169,20 @@
               <a:buNone/>
             </a:pPr>
             <a:r>
-              <a:rPr lang="en-US" sz="1600" dirty="0">
+              <a:rPr lang="en-US" sz="1100" dirty="0">
                 <a:solidFill>
                   <a:srgbClr val="5C5F6B"/>
                 </a:solidFill>
               </a:rPr>
               <a:t>21:00 · Y ahora… ¡clase de coreano! Estos días ando súper ocupado. Jaja.</a:t>
             </a:r>
-            <a:endParaRPr lang="en-US" sz="1600" dirty="0"/>
-          </a:p>
-        </p:txBody>
-      </p:sp>
-      <p:sp>
-        <p:nvSpPr>
-          <p:cNvPr id="25" name="Slide Number Placeholder 0"/>
+            <a:endParaRPr lang="en-US" sz="1100" dirty="0"/>
+          </a:p>
+        </p:txBody>
+      </p:sp>
+      <p:sp>
+        <p:nvSpPr>
+          <p:cNvPr id="29" name="Slide Number Placeholder 0"/>
           <p:cNvSpPr>
             <a:spLocks noGrp="1"/>
           </p:cNvSpPr>
@@ -33255,7 +33332,7 @@
         <p:spPr>
           <a:xfrm>
             <a:off x="548640" y="1325880"/>
-            <a:ext cx="11064240" cy="457200"/>
+            <a:ext cx="11091672" cy="457200"/>
           </a:xfrm>
           <a:prstGeom prst="rect">
             <a:avLst/>
@@ -33701,7 +33778,7 @@
                 <a:ea typeface="Malgun Gothic" pitchFamily="34" charset="-122"/>
                 <a:cs typeface="Malgun Gothic" pitchFamily="34" charset="-120"/>
               </a:rPr>
-              <a:t>일곱 시쯤</a:t>
+              <a:t>일곱 시쯤</a:t>
             </a:r>
             <a:endParaRPr lang="en-US" sz="5400" dirty="0"/>
           </a:p>
@@ -33963,7 +34040,7 @@
         <p:spPr>
           <a:xfrm>
             <a:off x="548640" y="1325880"/>
-            <a:ext cx="11064240" cy="457200"/>
+            <a:ext cx="11091672" cy="457200"/>
           </a:xfrm>
           <a:prstGeom prst="rect">
             <a:avLst/>
@@ -34118,7 +34195,7 @@
           <p:nvPr>
             <p:extLst>
               <p:ext uri="{D42A27DB-BD31-4B8C-83A1-F6EECF244321}">
-                <p14:modId xmlns:p14="http://schemas.microsoft.com/office/powerpoint/2010/main" val="2830601301"/>
+                <p14:modId xmlns:p14="http://schemas.microsoft.com/office/powerpoint/2010/main" val="2946937256"/>
               </p:ext>
             </p:extLst>
           </p:nvPr>

--- a/Curriculo/Fase3_Basico2/decks/Basico2_S03_Jay.pptx
+++ b/Curriculo/Fase3_Basico2/decks/Basico2_S03_Jay.pptx
@@ -140,7 +140,7 @@
   <p:extLst>
     <p:ext uri="{521415D9-36F7-43E2-AB2F-B90AF26B5E84}">
       <p14:sectionLst xmlns:p14="http://schemas.microsoft.com/office/powerpoint/2010/main">
-        <p14:section name="Semana 3" id="{3814C3A2-07F5-4CB5-4D1C-73FC3F525683}">
+        <p14:section name="Semana 3" id="{D269F2A9-31C3-6854-00FE-83BDC172CE4C}">
           <p14:sldIdLst>
             <p14:sldId id="256"/>
             <p14:sldId id="257"/>
@@ -212,7 +212,7 @@
     </p:spTree>
     <p:extLst>
       <p:ext uri="{BB962C8B-B14F-4D97-AF65-F5344CB8AC3E}">
-        <p14:creationId xmlns:p14="http://schemas.microsoft.com/office/powerpoint/2010/main" val="3876468707"/>
+        <p14:creationId xmlns:p14="http://schemas.microsoft.com/office/powerpoint/2010/main" val="2149753777"/>
       </p:ext>
     </p:extLst>
   </p:cSld>
@@ -6889,7 +6889,7 @@
           <p:nvPr>
             <p:extLst>
               <p:ext uri="{D42A27DB-BD31-4B8C-83A1-F6EECF244321}">
-                <p14:modId xmlns:p14="http://schemas.microsoft.com/office/powerpoint/2010/main" val="832117448"/>
+                <p14:modId xmlns:p14="http://schemas.microsoft.com/office/powerpoint/2010/main" val="2172595864"/>
               </p:ext>
             </p:extLst>
           </p:nvPr>
@@ -13066,7 +13066,7 @@
           <p:nvPr>
             <p:extLst>
               <p:ext uri="{D42A27DB-BD31-4B8C-83A1-F6EECF244321}">
-                <p14:modId xmlns:p14="http://schemas.microsoft.com/office/powerpoint/2010/main" val="2888937245"/>
+                <p14:modId xmlns:p14="http://schemas.microsoft.com/office/powerpoint/2010/main" val="1573711975"/>
               </p:ext>
             </p:extLst>
           </p:nvPr>
@@ -28651,7 +28651,7 @@
                   <a:srgbClr val="14142B"/>
                 </a:solidFill>
               </a:rPr>
-              <a:t>Plazo: miércoles 4 de noviembre, 21:00 (hora de Chile)</a:t>
+              <a:t>Plazo: miércoles 11 de noviembre, 21:00 (hora de Chile)</a:t>
             </a:r>
             <a:endParaRPr lang="en-US" sz="2000" dirty="0"/>
           </a:p>
@@ -30675,7 +30675,7 @@
           <p:nvPr>
             <p:extLst>
               <p:ext uri="{D42A27DB-BD31-4B8C-83A1-F6EECF244321}">
-                <p14:modId xmlns:p14="http://schemas.microsoft.com/office/powerpoint/2010/main" val="4083521409"/>
+                <p14:modId xmlns:p14="http://schemas.microsoft.com/office/powerpoint/2010/main" val="3462648478"/>
               </p:ext>
             </p:extLst>
           </p:nvPr>
@@ -34195,7 +34195,7 @@
           <p:nvPr>
             <p:extLst>
               <p:ext uri="{D42A27DB-BD31-4B8C-83A1-F6EECF244321}">
-                <p14:modId xmlns:p14="http://schemas.microsoft.com/office/powerpoint/2010/main" val="2946937256"/>
+                <p14:modId xmlns:p14="http://schemas.microsoft.com/office/powerpoint/2010/main" val="1334925452"/>
               </p:ext>
             </p:extLst>
           </p:nvPr>
